--- a/docs/conformite/synthese-audit-2026-08.pptx
+++ b/docs/conformite/synthese-audit-2026-08.pptx
@@ -18,9 +18,10 @@
     <p:sldId id="266" r:id="rId12"/>
     <p:sldId id="267" r:id="rId13"/>
     <p:sldId id="268" r:id="rId14"/>
+    <p:sldId id="269" r:id="rId15"/>
   </p:sldIdLst>
   <p:notesMasterIdLst>
-    <p:notesMasterId r:id="rId15"/>
+    <p:notesMasterId r:id="rId16"/>
   </p:notesMasterIdLst>
   <p:sldSz cx="12192000" cy="6858000"/>
   <p:notesSz cx="6858000" cy="12192000"/>
@@ -206,7 +207,7 @@
                   <c:v>2</c:v>
                 </c:pt>
                 <c:pt idx="1">
-                  <c:v>5</c:v>
+                  <c:v>6</c:v>
                 </c:pt>
                 <c:pt idx="2">
                   <c:v>5</c:v>
@@ -374,7 +375,7 @@
                   <c:v>0</c:v>
                 </c:pt>
                 <c:pt idx="1">
-                  <c:v>1</c:v>
+                  <c:v>0</c:v>
                 </c:pt>
                 <c:pt idx="2">
                   <c:v>1</c:v>
@@ -943,7 +944,7 @@
           <a:p>
             <a:r>
               <a:rPr lang="en-US" dirty="0"/>
-              <a:t>Deck de synthèse destiné aux clients entreprises. L’audit du 13 août 2026 a relevé 15 manquements (2 critiques, 7 élevés, 6 moyens). Au 19 août : 12 clos, 1 au socle en place (mentions légales, activation à l’immatriculation), 2 en cours (suivi d’activité, documentation juridique).</a:t>
+              <a:t>Deck de synthèse destiné aux clients entreprises. L’audit du 13 août 2026 a relevé 15 manquements (2 critiques, 7 élevés, 6 moyens). Au 19 août : 13 clos — dont le suivi d’activité, rendu agrégé ce jour-là —, 1 au socle en place (mentions légales, activation à l’immatriculation) et 1 en relecture (documentation juridique).</a:t>
             </a:r>
             <a:endParaRPr lang="en-US" dirty="0"/>
           </a:p>
@@ -1031,7 +1032,7 @@
           <a:p>
             <a:r>
               <a:rPr lang="en-US" dirty="0"/>
-              <a:t/>
+              <a:t>Argument à mettre en avant devant un CSE ou un service juridique : le produit ne permet plus de suivre l’activité individuelle en direct.</a:t>
             </a:r>
             <a:endParaRPr lang="en-US" dirty="0"/>
           </a:p>
@@ -1337,6 +1338,94 @@
 </p:notes>
 </file>
 
+<file path=ppt/notesSlides/notesSlide14.xml><?xml version="1.0" encoding="utf-8"?>
+<p:notes xmlns:a="http://schemas.openxmlformats.org/drawingml/2006/main" xmlns:r="http://schemas.openxmlformats.org/officeDocument/2006/relationships" xmlns:p="http://schemas.openxmlformats.org/presentationml/2006/main">
+  <p:cSld>
+    <p:spTree>
+      <p:nvGrpSpPr>
+        <p:cNvPr id="1" name=""/>
+        <p:cNvGrpSpPr/>
+        <p:nvPr/>
+      </p:nvGrpSpPr>
+      <p:grpSpPr>
+        <a:xfrm>
+          <a:off x="0" y="0"/>
+          <a:ext cx="0" cy="0"/>
+          <a:chOff x="0" y="0"/>
+          <a:chExt cx="0" cy="0"/>
+        </a:xfrm>
+      </p:grpSpPr>
+      <p:sp>
+        <p:nvSpPr>
+          <p:cNvPr id="2" name="Slide Image Placeholder 1"/>
+          <p:cNvSpPr>
+            <a:spLocks noGrp="1" noRot="1" noChangeAspect="1"/>
+          </p:cNvSpPr>
+          <p:nvPr>
+            <p:ph type="sldImg"/>
+          </p:nvPr>
+        </p:nvSpPr>
+        <p:spPr/>
+      </p:sp>
+      <p:sp>
+        <p:nvSpPr>
+          <p:cNvPr id="3" name="Notes Placeholder 2"/>
+          <p:cNvSpPr>
+            <a:spLocks noGrp="1"/>
+          </p:cNvSpPr>
+          <p:nvPr>
+            <p:ph type="body" idx="1"/>
+          </p:nvPr>
+        </p:nvSpPr>
+        <p:spPr/>
+        <p:txBody>
+          <a:bodyPr/>
+          <a:lstStyle/>
+          <a:p>
+            <a:r>
+              <a:rPr lang="en-US" dirty="0"/>
+              <a:t/>
+            </a:r>
+            <a:endParaRPr lang="en-US" dirty="0"/>
+          </a:p>
+        </p:txBody>
+      </p:sp>
+      <p:sp>
+        <p:nvSpPr>
+          <p:cNvPr id="4" name="Slide Number Placeholder 3"/>
+          <p:cNvSpPr>
+            <a:spLocks noGrp="1"/>
+          </p:cNvSpPr>
+          <p:nvPr>
+            <p:ph type="sldNum" sz="quarter" idx="10"/>
+          </p:nvPr>
+        </p:nvSpPr>
+        <p:spPr/>
+        <p:txBody>
+          <a:bodyPr/>
+          <a:lstStyle/>
+          <a:p>
+            <a:fld id="{F7021451-1387-4CA6-816F-3879F97B5CBC}" type="slidenum">
+              <a:rPr lang="en-US"/>
+              <a:t>14</a:t>
+            </a:fld>
+            <a:endParaRPr lang="en-US"/>
+          </a:p>
+        </p:txBody>
+      </p:sp>
+    </p:spTree>
+    <p:extLst>
+      <p:ext uri="{BB962C8B-B14F-4D97-AF65-F5344CB8AC3E}">
+        <p14:creationId xmlns:p14="http://schemas.microsoft.com/office/powerpoint/2010/main" val="1024086991"/>
+      </p:ext>
+    </p:extLst>
+  </p:cSld>
+  <p:clrMapOvr>
+    <a:masterClrMapping/>
+  </p:clrMapOvr>
+</p:notes>
+</file>
+
 <file path=ppt/notesSlides/notesSlide2.xml><?xml version="1.0" encoding="utf-8"?>
 <p:notes xmlns:a="http://schemas.openxmlformats.org/drawingml/2006/main" xmlns:r="http://schemas.openxmlformats.org/officeDocument/2006/relationships" xmlns:p="http://schemas.openxmlformats.org/presentationml/2006/main">
   <p:cSld>
@@ -1471,7 +1560,7 @@
           <a:p>
             <a:r>
               <a:rPr lang="en-US" dirty="0"/>
-              <a:t>Aucun constat critique ni élevé ne reste ouvert sur la sécurité technique. Les deux points en cours relèvent de la documentation et de l’information des salariés.</a:t>
+              <a:t>Plus aucun constat critique ni élevé n’est ouvert. Le seul point en cours relève de la relecture juridique, pas de la sécurité technique.</a:t>
             </a:r>
             <a:endParaRPr lang="en-US" dirty="0"/>
           </a:p>
@@ -2662,7 +2751,7 @@
                 <a:ea typeface="Cambria" pitchFamily="34" charset="-122"/>
                 <a:cs typeface="Cambria" pitchFamily="34" charset="-120"/>
               </a:rPr>
-              <a:t>12</a:t>
+              <a:t>13</a:t>
             </a:r>
             <a:endParaRPr lang="en-US" sz="4400" dirty="0"/>
           </a:p>
@@ -2740,7 +2829,7 @@
                 <a:ea typeface="Cambria" pitchFamily="34" charset="-122"/>
                 <a:cs typeface="Cambria" pitchFamily="34" charset="-120"/>
               </a:rPr>
-              <a:t>3</a:t>
+              <a:t>2</a:t>
             </a:r>
             <a:endParaRPr lang="en-US" sz="4400" dirty="0"/>
           </a:p>
@@ -2779,7 +2868,7 @@
                 <a:ea typeface="Calibri" pitchFamily="34" charset="-122"/>
                 <a:cs typeface="Calibri" pitchFamily="34" charset="-120"/>
               </a:rPr>
-              <a:t>en cours</a:t>
+              <a:t>restants</a:t>
             </a:r>
             <a:endParaRPr lang="en-US" sz="1300" dirty="0"/>
           </a:p>
@@ -2843,7 +2932,7 @@
                 <a:ea typeface="Cambria" pitchFamily="34" charset="-122"/>
                 <a:cs typeface="Cambria" pitchFamily="34" charset="-120"/>
               </a:rPr>
-              <a:t>Ce qui reste en cours</a:t>
+              <a:t>Le suivi d’activité, repensé</a:t>
             </a:r>
             <a:endParaRPr lang="en-US" sz="3400" dirty="0"/>
           </a:p>
@@ -2882,7 +2971,7 @@
                 <a:ea typeface="Calibri" pitchFamily="34" charset="-122"/>
                 <a:cs typeface="Calibri" pitchFamily="34" charset="-120"/>
               </a:rPr>
-              <a:t>Deux chantiers ouverts, et ce qu’ils changent pour vous</a:t>
+              <a:t>Décision produit du 19 août 2026 — la question que pose tout CSE</a:t>
             </a:r>
             <a:endParaRPr lang="en-US" sz="1400" dirty="0"/>
           </a:p>
@@ -2890,44 +2979,30 @@
       </p:sp>
       <p:sp>
         <p:nvSpPr>
-          <p:cNvPr id="4" name="Text 2"/>
-          <p:cNvSpPr/>
-          <p:nvPr/>
-        </p:nvSpPr>
-        <p:spPr>
-          <a:xfrm>
-            <a:off x="640080" y="1682496"/>
-            <a:ext cx="530352" cy="530352"/>
-          </a:xfrm>
-          <a:prstGeom prst="ellipse">
-            <a:avLst/>
+          <p:cNvPr id="4" name="Shape 2"/>
+          <p:cNvSpPr/>
+          <p:nvPr/>
+        </p:nvSpPr>
+        <p:spPr>
+          <a:xfrm>
+            <a:off x="640080" y="1645920"/>
+            <a:ext cx="5349240" cy="2697480"/>
+          </a:xfrm>
+          <a:prstGeom prst="roundRect">
+            <a:avLst>
+              <a:gd name="adj" fmla="val 3390"/>
+            </a:avLst>
           </a:prstGeom>
           <a:solidFill>
-            <a:srgbClr val="9B2C2C"/>
+            <a:srgbClr val="F4F6F8"/>
           </a:solidFill>
-          <a:ln/>
-        </p:spPr>
-        <p:txBody>
-          <a:bodyPr wrap="square" lIns="0" tIns="0" rIns="0" bIns="0" rtlCol="0" anchor="ctr"/>
-          <a:lstStyle/>
-          <a:p>
-            <a:pPr algn="ctr" indent="0" marL="0">
-              <a:buNone/>
-            </a:pPr>
-            <a:r>
-              <a:rPr lang="en-US" sz="1200" b="1" dirty="0">
-                <a:solidFill>
-                  <a:srgbClr val="FFFFFF"/>
-                </a:solidFill>
-                <a:latin typeface="Calibri" pitchFamily="34" charset="0"/>
-                <a:ea typeface="Calibri" pitchFamily="34" charset="-122"/>
-                <a:cs typeface="Calibri" pitchFamily="34" charset="-120"/>
-              </a:rPr>
-              <a:t>E3</a:t>
-            </a:r>
-            <a:endParaRPr lang="en-US" sz="1200" dirty="0"/>
-          </a:p>
-        </p:txBody>
+          <a:ln w="12700">
+            <a:solidFill>
+              <a:srgbClr val="E1E7ED"/>
+            </a:solidFill>
+            <a:prstDash val="solid"/>
+          </a:ln>
+        </p:spPr>
       </p:sp>
       <p:sp>
         <p:nvSpPr>
@@ -2937,8 +3012,8 @@
         </p:nvSpPr>
         <p:spPr>
           <a:xfrm>
-            <a:off x="1417320" y="1645920"/>
-            <a:ext cx="5394960" cy="365760"/>
+            <a:off x="960120" y="1847088"/>
+            <a:ext cx="4709160" cy="365760"/>
           </a:xfrm>
           <a:prstGeom prst="rect">
             <a:avLst/>
@@ -2956,13 +3031,13 @@
             <a:r>
               <a:rPr lang="en-US" sz="1900" b="1" dirty="0">
                 <a:solidFill>
-                  <a:srgbClr val="12233A"/>
+                  <a:srgbClr val="9B2C2C"/>
                 </a:solidFill>
                 <a:latin typeface="Cambria" pitchFamily="34" charset="0"/>
                 <a:ea typeface="Cambria" pitchFamily="34" charset="-122"/>
                 <a:cs typeface="Cambria" pitchFamily="34" charset="-120"/>
               </a:rPr>
-              <a:t>Suivi d’activité des équipes</a:t>
+              <a:t>Avant</a:t>
             </a:r>
             <a:endParaRPr lang="en-US" sz="1900" dirty="0"/>
           </a:p>
@@ -2976,63 +3051,28 @@
         </p:nvSpPr>
         <p:spPr>
           <a:xfrm>
-            <a:off x="6903720" y="1673352"/>
-            <a:ext cx="4434840" cy="320040"/>
-          </a:xfrm>
-          <a:prstGeom prst="rect">
-            <a:avLst/>
-          </a:prstGeom>
-          <a:noFill/>
-          <a:ln/>
-        </p:spPr>
-        <p:txBody>
-          <a:bodyPr wrap="square" lIns="0" tIns="0" rIns="0" bIns="0" rtlCol="0" anchor="ctr"/>
-          <a:lstStyle/>
-          <a:p>
-            <a:pPr algn="r" indent="0" marL="0">
-              <a:buNone/>
-            </a:pPr>
-            <a:r>
-              <a:rPr lang="en-US" sz="1150" b="1" dirty="0">
-                <a:solidFill>
-                  <a:srgbClr val="B07A1E"/>
-                </a:solidFill>
-                <a:latin typeface="Calibri" pitchFamily="34" charset="0"/>
-                <a:ea typeface="Calibri" pitchFamily="34" charset="-122"/>
-                <a:cs typeface="Calibri" pitchFamily="34" charset="-120"/>
-              </a:rPr>
-              <a:t>Analysé et documenté · arbitrages ouverts</a:t>
-            </a:r>
-            <a:endParaRPr lang="en-US" sz="1150" dirty="0"/>
-          </a:p>
-        </p:txBody>
-      </p:sp>
-      <p:sp>
-        <p:nvSpPr>
-          <p:cNvPr id="7" name="Text 5"/>
-          <p:cNvSpPr/>
-          <p:nvPr/>
-        </p:nvSpPr>
-        <p:spPr>
-          <a:xfrm>
-            <a:off x="1417320" y="2057400"/>
-            <a:ext cx="10058400" cy="914400"/>
-          </a:xfrm>
-          <a:prstGeom prst="rect">
-            <a:avLst/>
-          </a:prstGeom>
-          <a:noFill/>
-          <a:ln/>
-        </p:spPr>
-        <p:txBody>
-          <a:bodyPr wrap="square" lIns="0" tIns="0" rIns="0" bIns="0" rtlCol="0" anchor="ctr"/>
-          <a:lstStyle/>
-          <a:p>
-            <a:pPr indent="0" marL="0">
+            <a:off x="960120" y="2286000"/>
+            <a:ext cx="4709160" cy="1920240"/>
+          </a:xfrm>
+          <a:prstGeom prst="rect">
+            <a:avLst/>
+          </a:prstGeom>
+          <a:noFill/>
+          <a:ln/>
+        </p:spPr>
+        <p:txBody>
+          <a:bodyPr wrap="square" lIns="0" tIns="0" rIns="0" bIns="0" rtlCol="0" anchor="ctr"/>
+          <a:lstStyle/>
+          <a:p>
+            <a:pPr marL="342900" indent="-342900">
               <a:lnSpc>
                 <a:spcPts val="1600"/>
               </a:lnSpc>
-              <a:buNone/>
+              <a:spcAft>
+                <a:spcPts val="700"/>
+              </a:spcAft>
+              <a:buSzPct val="100000"/>
+              <a:buChar char="•"/>
             </a:pPr>
             <a:r>
               <a:rPr lang="en-US" sz="1250" dirty="0">
@@ -3043,11 +3083,110 @@
                 <a:ea typeface="Calibri" pitchFamily="34" charset="-122"/>
                 <a:cs typeface="Calibri" pitchFamily="34" charset="-120"/>
               </a:rPr>
-              <a:t>Pendant un inventaire, le superviseur voit qui est connecté, sur quelle zone et dans quel mode. C’est un suivi nominatif de salariés : il est désormais décrit dans notre politique et analysé par écrit. Restent l’information des salariés, la consultation du CSE et l’analyse d’impact — actes qui vous reviennent, et pour lesquels nous fournissons une note type.</a:t>
+              <a:t>Le nom de chaque personne, en direct</a:t>
             </a:r>
             <a:endParaRPr lang="en-US" sz="1250" dirty="0"/>
           </a:p>
-        </p:txBody>
+          <a:p>
+            <a:pPr marL="342900" indent="-342900">
+              <a:lnSpc>
+                <a:spcPts val="1600"/>
+              </a:lnSpc>
+              <a:spcAft>
+                <a:spcPts val="700"/>
+              </a:spcAft>
+              <a:buSzPct val="100000"/>
+              <a:buChar char="•"/>
+            </a:pPr>
+            <a:r>
+              <a:rPr lang="en-US" sz="1250" dirty="0">
+                <a:solidFill>
+                  <a:srgbClr val="1B2A3A"/>
+                </a:solidFill>
+                <a:latin typeface="Calibri" pitchFamily="34" charset="0"/>
+                <a:ea typeface="Calibri" pitchFamily="34" charset="-122"/>
+                <a:cs typeface="Calibri" pitchFamily="34" charset="-120"/>
+              </a:rPr>
+              <a:t>L’écran ouvert et la zone en cours</a:t>
+            </a:r>
+            <a:endParaRPr lang="en-US" sz="1250" dirty="0"/>
+          </a:p>
+          <a:p>
+            <a:pPr marL="342900" indent="-342900">
+              <a:lnSpc>
+                <a:spcPts val="1600"/>
+              </a:lnSpc>
+              <a:spcAft>
+                <a:spcPts val="700"/>
+              </a:spcAft>
+              <a:buSzPct val="100000"/>
+              <a:buChar char="•"/>
+            </a:pPr>
+            <a:r>
+              <a:rPr lang="en-US" sz="1250" dirty="0">
+                <a:solidFill>
+                  <a:srgbClr val="1B2A3A"/>
+                </a:solidFill>
+                <a:latin typeface="Calibri" pitchFamily="34" charset="0"/>
+                <a:ea typeface="Calibri" pitchFamily="34" charset="-122"/>
+                <a:cs typeface="Calibri" pitchFamily="34" charset="-120"/>
+              </a:rPr>
+              <a:t>Un battement toutes les 30 secondes</a:t>
+            </a:r>
+            <a:endParaRPr lang="en-US" sz="1250" dirty="0"/>
+          </a:p>
+          <a:p>
+            <a:pPr marL="342900" indent="-342900">
+              <a:lnSpc>
+                <a:spcPts val="1600"/>
+              </a:lnSpc>
+              <a:spcAft>
+                <a:spcPts val="700"/>
+              </a:spcAft>
+              <a:buSzPct val="100000"/>
+              <a:buChar char="•"/>
+            </a:pPr>
+            <a:r>
+              <a:rPr lang="en-US" sz="1250" dirty="0">
+                <a:solidFill>
+                  <a:srgbClr val="1B2A3A"/>
+                </a:solidFill>
+                <a:latin typeface="Calibri" pitchFamily="34" charset="0"/>
+                <a:ea typeface="Calibri" pitchFamily="34" charset="-122"/>
+                <a:cs typeface="Calibri" pitchFamily="34" charset="-120"/>
+              </a:rPr>
+              <a:t>L’application au premier plan — un téléphone rangé devenait un signal</a:t>
+            </a:r>
+            <a:endParaRPr lang="en-US" sz="1250" dirty="0"/>
+          </a:p>
+        </p:txBody>
+      </p:sp>
+      <p:sp>
+        <p:nvSpPr>
+          <p:cNvPr id="7" name="Shape 5"/>
+          <p:cNvSpPr/>
+          <p:nvPr/>
+        </p:nvSpPr>
+        <p:spPr>
+          <a:xfrm>
+            <a:off x="6263640" y="1645920"/>
+            <a:ext cx="5349240" cy="2697480"/>
+          </a:xfrm>
+          <a:prstGeom prst="roundRect">
+            <a:avLst>
+              <a:gd name="adj" fmla="val 3390"/>
+            </a:avLst>
+          </a:prstGeom>
+          <a:solidFill>
+            <a:srgbClr val="F4F6F8"/>
+          </a:solidFill>
+          <a:ln w="12700">
+            <a:solidFill>
+              <a:srgbClr val="E1E7ED"/>
+            </a:solidFill>
+            <a:prstDash val="solid"/>
+          </a:ln>
+        </p:spPr>
       </p:sp>
       <p:sp>
         <p:nvSpPr>
@@ -3057,8 +3196,273 @@
         </p:nvSpPr>
         <p:spPr>
           <a:xfrm>
-            <a:off x="1417320" y="3017520"/>
-            <a:ext cx="10058400" cy="548640"/>
+            <a:off x="6583680" y="1847088"/>
+            <a:ext cx="4709160" cy="365760"/>
+          </a:xfrm>
+          <a:prstGeom prst="rect">
+            <a:avLst/>
+          </a:prstGeom>
+          <a:noFill/>
+          <a:ln/>
+        </p:spPr>
+        <p:txBody>
+          <a:bodyPr wrap="square" lIns="0" tIns="0" rIns="0" bIns="0" rtlCol="0" anchor="ctr"/>
+          <a:lstStyle/>
+          <a:p>
+            <a:pPr indent="0" marL="0">
+              <a:buNone/>
+            </a:pPr>
+            <a:r>
+              <a:rPr lang="en-US" sz="1900" b="1" dirty="0">
+                <a:solidFill>
+                  <a:srgbClr val="1F7A5C"/>
+                </a:solidFill>
+                <a:latin typeface="Cambria" pitchFamily="34" charset="0"/>
+                <a:ea typeface="Cambria" pitchFamily="34" charset="-122"/>
+                <a:cs typeface="Cambria" pitchFamily="34" charset="-120"/>
+              </a:rPr>
+              <a:t>Depuis le 19 août</a:t>
+            </a:r>
+            <a:endParaRPr lang="en-US" sz="1900" dirty="0"/>
+          </a:p>
+        </p:txBody>
+      </p:sp>
+      <p:sp>
+        <p:nvSpPr>
+          <p:cNvPr id="9" name="Text 7"/>
+          <p:cNvSpPr/>
+          <p:nvPr/>
+        </p:nvSpPr>
+        <p:spPr>
+          <a:xfrm>
+            <a:off x="6583680" y="2286000"/>
+            <a:ext cx="4709160" cy="1920240"/>
+          </a:xfrm>
+          <a:prstGeom prst="rect">
+            <a:avLst/>
+          </a:prstGeom>
+          <a:noFill/>
+          <a:ln/>
+        </p:spPr>
+        <p:txBody>
+          <a:bodyPr wrap="square" lIns="0" tIns="0" rIns="0" bIns="0" rtlCol="0" anchor="ctr"/>
+          <a:lstStyle/>
+          <a:p>
+            <a:pPr marL="342900" indent="-342900">
+              <a:lnSpc>
+                <a:spcPts val="1600"/>
+              </a:lnSpc>
+              <a:spcAft>
+                <a:spcPts val="700"/>
+              </a:spcAft>
+              <a:buSzPct val="100000"/>
+              <a:buChar char="•"/>
+            </a:pPr>
+            <a:r>
+              <a:rPr lang="en-US" sz="1250" dirty="0">
+                <a:solidFill>
+                  <a:srgbClr val="1B2A3A"/>
+                </a:solidFill>
+                <a:latin typeface="Calibri" pitchFamily="34" charset="0"/>
+                <a:ea typeface="Calibri" pitchFamily="34" charset="-122"/>
+                <a:cs typeface="Calibri" pitchFamily="34" charset="-120"/>
+              </a:rPr>
+              <a:t>Des compteurs : appareils connectés, en comptage, en audit</a:t>
+            </a:r>
+            <a:endParaRPr lang="en-US" sz="1250" dirty="0"/>
+          </a:p>
+          <a:p>
+            <a:pPr marL="342900" indent="-342900">
+              <a:lnSpc>
+                <a:spcPts val="1600"/>
+              </a:lnSpc>
+              <a:spcAft>
+                <a:spcPts val="700"/>
+              </a:spcAft>
+              <a:buSzPct val="100000"/>
+              <a:buChar char="•"/>
+            </a:pPr>
+            <a:r>
+              <a:rPr lang="en-US" sz="1250" dirty="0">
+                <a:solidFill>
+                  <a:srgbClr val="1B2A3A"/>
+                </a:solidFill>
+                <a:latin typeface="Calibri" pitchFamily="34" charset="0"/>
+                <a:ea typeface="Calibri" pitchFamily="34" charset="-122"/>
+                <a:cs typeface="Calibri" pitchFamily="34" charset="-120"/>
+              </a:rPr>
+              <a:t>Le pilotage passe par l’avancement des zones, pas par les personnes</a:t>
+            </a:r>
+            <a:endParaRPr lang="en-US" sz="1250" dirty="0"/>
+          </a:p>
+          <a:p>
+            <a:pPr marL="342900" indent="-342900">
+              <a:lnSpc>
+                <a:spcPts val="1600"/>
+              </a:lnSpc>
+              <a:spcAft>
+                <a:spcPts val="700"/>
+              </a:spcAft>
+              <a:buSzPct val="100000"/>
+              <a:buChar char="•"/>
+            </a:pPr>
+            <a:r>
+              <a:rPr lang="en-US" sz="1250" dirty="0">
+                <a:solidFill>
+                  <a:srgbClr val="1B2A3A"/>
+                </a:solidFill>
+                <a:latin typeface="Calibri" pitchFamily="34" charset="0"/>
+                <a:ea typeface="Calibri" pitchFamily="34" charset="-122"/>
+                <a:cs typeface="Calibri" pitchFamily="34" charset="-120"/>
+              </a:rPr>
+              <a:t>Le signal ne porte plus aucun nom, ni aucun identifiant de compte</a:t>
+            </a:r>
+            <a:endParaRPr lang="en-US" sz="1250" dirty="0"/>
+          </a:p>
+          <a:p>
+            <a:pPr marL="342900" indent="-342900">
+              <a:lnSpc>
+                <a:spcPts val="1600"/>
+              </a:lnSpc>
+              <a:spcAft>
+                <a:spcPts val="700"/>
+              </a:spcAft>
+              <a:buSzPct val="100000"/>
+              <a:buChar char="•"/>
+            </a:pPr>
+            <a:r>
+              <a:rPr lang="en-US" sz="1250" dirty="0">
+                <a:solidFill>
+                  <a:srgbClr val="1B2A3A"/>
+                </a:solidFill>
+                <a:latin typeface="Calibri" pitchFamily="34" charset="0"/>
+                <a:ea typeface="Calibri" pitchFamily="34" charset="-122"/>
+                <a:cs typeface="Calibri" pitchFamily="34" charset="-120"/>
+              </a:rPr>
+              <a:t>L’état d’avant-plan a purement disparu</a:t>
+            </a:r>
+            <a:endParaRPr lang="en-US" sz="1250" dirty="0"/>
+          </a:p>
+        </p:txBody>
+      </p:sp>
+      <p:sp>
+        <p:nvSpPr>
+          <p:cNvPr id="10" name="Shape 8"/>
+          <p:cNvSpPr/>
+          <p:nvPr/>
+        </p:nvSpPr>
+        <p:spPr>
+          <a:xfrm>
+            <a:off x="640080" y="4572000"/>
+            <a:ext cx="10881360" cy="1234440"/>
+          </a:xfrm>
+          <a:prstGeom prst="roundRect">
+            <a:avLst>
+              <a:gd name="adj" fmla="val 7407"/>
+            </a:avLst>
+          </a:prstGeom>
+          <a:solidFill>
+            <a:srgbClr val="12233A"/>
+          </a:solidFill>
+          <a:ln w="12700">
+            <a:solidFill>
+              <a:srgbClr val="12233A"/>
+            </a:solidFill>
+            <a:prstDash val="solid"/>
+          </a:ln>
+        </p:spPr>
+      </p:sp>
+      <p:sp>
+        <p:nvSpPr>
+          <p:cNvPr id="11" name="Text 9"/>
+          <p:cNvSpPr/>
+          <p:nvPr/>
+        </p:nvSpPr>
+        <p:spPr>
+          <a:xfrm>
+            <a:off x="1005840" y="4709160"/>
+            <a:ext cx="10515600" cy="320040"/>
+          </a:xfrm>
+          <a:prstGeom prst="rect">
+            <a:avLst/>
+          </a:prstGeom>
+          <a:noFill/>
+          <a:ln/>
+        </p:spPr>
+        <p:txBody>
+          <a:bodyPr wrap="square" lIns="0" tIns="0" rIns="0" bIns="0" rtlCol="0" anchor="ctr"/>
+          <a:lstStyle/>
+          <a:p>
+            <a:pPr indent="0" marL="0">
+              <a:buNone/>
+            </a:pPr>
+            <a:r>
+              <a:rPr lang="en-US" sz="1300" b="1" dirty="0">
+                <a:solidFill>
+                  <a:srgbClr val="5FD3A6"/>
+                </a:solidFill>
+                <a:latin typeface="Calibri" pitchFamily="34" charset="0"/>
+                <a:ea typeface="Calibri" pitchFamily="34" charset="-122"/>
+                <a:cs typeface="Calibri" pitchFamily="34" charset="-120"/>
+              </a:rPr>
+              <a:t>Ce que cela change pour vous</a:t>
+            </a:r>
+            <a:endParaRPr lang="en-US" sz="1300" dirty="0"/>
+          </a:p>
+        </p:txBody>
+      </p:sp>
+      <p:sp>
+        <p:nvSpPr>
+          <p:cNvPr id="12" name="Text 10"/>
+          <p:cNvSpPr/>
+          <p:nvPr/>
+        </p:nvSpPr>
+        <p:spPr>
+          <a:xfrm>
+            <a:off x="1005840" y="5029200"/>
+            <a:ext cx="10515600" cy="685800"/>
+          </a:xfrm>
+          <a:prstGeom prst="rect">
+            <a:avLst/>
+          </a:prstGeom>
+          <a:noFill/>
+          <a:ln/>
+        </p:spPr>
+        <p:txBody>
+          <a:bodyPr wrap="square" lIns="0" tIns="0" rIns="0" bIns="0" rtlCol="0" anchor="ctr"/>
+          <a:lstStyle/>
+          <a:p>
+            <a:pPr indent="0" marL="0">
+              <a:lnSpc>
+                <a:spcPts val="1650"/>
+              </a:lnSpc>
+              <a:buNone/>
+            </a:pPr>
+            <a:r>
+              <a:rPr lang="en-US" sz="1250" dirty="0">
+                <a:solidFill>
+                  <a:srgbClr val="D8E3F0"/>
+                </a:solidFill>
+                <a:latin typeface="Calibri" pitchFamily="34" charset="0"/>
+                <a:ea typeface="Calibri" pitchFamily="34" charset="-122"/>
+                <a:cs typeface="Calibri" pitchFamily="34" charset="-120"/>
+              </a:rPr>
+              <a:t>Les lignes directrices européennes retenaient deux critères pour imposer une analyse d’impact : surveillance systématique et personnes vulnérables. Le premier tombe — il n’en reste qu’un. L’AIPD n’est donc, en principe, plus requise ; cela reste à motiver par écrit avec votre conseil.</a:t>
+            </a:r>
+            <a:endParaRPr lang="en-US" sz="1250" dirty="0"/>
+          </a:p>
+        </p:txBody>
+      </p:sp>
+      <p:sp>
+        <p:nvSpPr>
+          <p:cNvPr id="13" name="Text 11"/>
+          <p:cNvSpPr/>
+          <p:nvPr/>
+        </p:nvSpPr>
+        <p:spPr>
+          <a:xfrm>
+            <a:off x="640080" y="5943600"/>
+            <a:ext cx="10881360" cy="457200"/>
           </a:xfrm>
           <a:prstGeom prst="rect">
             <a:avLst/>
@@ -3077,7 +3481,7 @@
               <a:buNone/>
             </a:pPr>
             <a:r>
-              <a:rPr lang="en-US" sz="1150" b="1" i="1" dirty="0">
+              <a:rPr lang="en-US" sz="1150" i="1" dirty="0">
                 <a:solidFill>
                   <a:srgbClr val="44607F"/>
                 </a:solidFill>
@@ -3085,285 +3489,9 @@
                 <a:ea typeface="Calibri" pitchFamily="34" charset="-122"/>
                 <a:cs typeface="Calibri" pitchFamily="34" charset="-120"/>
               </a:rPr>
-              <a:t>Prochaine étape — </a:t>
-            </a:r>
-            <a:pPr indent="0" marL="0">
-              <a:lnSpc>
-                <a:spcPts val="1500"/>
-              </a:lnSpc>
-              <a:buNone/>
-            </a:pPr>
-            <a:r>
-              <a:rPr lang="en-US" sz="1150" i="1" dirty="0">
-                <a:solidFill>
-                  <a:srgbClr val="44607F"/>
-                </a:solidFill>
-                <a:latin typeface="Calibri" pitchFamily="34" charset="0"/>
-                <a:ea typeface="Calibri" pitchFamily="34" charset="-122"/>
-                <a:cs typeface="Calibri" pitchFamily="34" charset="-120"/>
-              </a:rPr>
-              <a:t>Décision produit à l’étude : retirer le signal « application au premier plan », le plus intrusif et le seul qui ne serve pas à l’inventaire.</a:t>
+              <a:t>Ce qui reste enregistré : l’auteur de chaque comptage, restitué dans le rapport. Arbitrer un écart suppose de savoir qui a compté — c’est une autre finalité, consultée à la demande.</a:t>
             </a:r>
             <a:endParaRPr lang="en-US" sz="1150" dirty="0"/>
-          </a:p>
-        </p:txBody>
-      </p:sp>
-      <p:sp>
-        <p:nvSpPr>
-          <p:cNvPr id="9" name="Text 7"/>
-          <p:cNvSpPr/>
-          <p:nvPr/>
-        </p:nvSpPr>
-        <p:spPr>
-          <a:xfrm>
-            <a:off x="640080" y="3831336"/>
-            <a:ext cx="530352" cy="530352"/>
-          </a:xfrm>
-          <a:prstGeom prst="ellipse">
-            <a:avLst/>
-          </a:prstGeom>
-          <a:solidFill>
-            <a:srgbClr val="9B2C2C"/>
-          </a:solidFill>
-          <a:ln/>
-        </p:spPr>
-        <p:txBody>
-          <a:bodyPr wrap="square" lIns="0" tIns="0" rIns="0" bIns="0" rtlCol="0" anchor="ctr"/>
-          <a:lstStyle/>
-          <a:p>
-            <a:pPr algn="ctr" indent="0" marL="0">
-              <a:buNone/>
-            </a:pPr>
-            <a:r>
-              <a:rPr lang="en-US" sz="1200" b="1" dirty="0">
-                <a:solidFill>
-                  <a:srgbClr val="FFFFFF"/>
-                </a:solidFill>
-                <a:latin typeface="Calibri" pitchFamily="34" charset="0"/>
-                <a:ea typeface="Calibri" pitchFamily="34" charset="-122"/>
-                <a:cs typeface="Calibri" pitchFamily="34" charset="-120"/>
-              </a:rPr>
-              <a:t>M5</a:t>
-            </a:r>
-            <a:endParaRPr lang="en-US" sz="1200" dirty="0"/>
-          </a:p>
-        </p:txBody>
-      </p:sp>
-      <p:sp>
-        <p:nvSpPr>
-          <p:cNvPr id="10" name="Text 8"/>
-          <p:cNvSpPr/>
-          <p:nvPr/>
-        </p:nvSpPr>
-        <p:spPr>
-          <a:xfrm>
-            <a:off x="1417320" y="3794760"/>
-            <a:ext cx="5394960" cy="365760"/>
-          </a:xfrm>
-          <a:prstGeom prst="rect">
-            <a:avLst/>
-          </a:prstGeom>
-          <a:noFill/>
-          <a:ln/>
-        </p:spPr>
-        <p:txBody>
-          <a:bodyPr wrap="square" lIns="0" tIns="0" rIns="0" bIns="0" rtlCol="0" anchor="ctr"/>
-          <a:lstStyle/>
-          <a:p>
-            <a:pPr indent="0" marL="0">
-              <a:buNone/>
-            </a:pPr>
-            <a:r>
-              <a:rPr lang="en-US" sz="1900" b="1" dirty="0">
-                <a:solidFill>
-                  <a:srgbClr val="12233A"/>
-                </a:solidFill>
-                <a:latin typeface="Cambria" pitchFamily="34" charset="0"/>
-                <a:ea typeface="Cambria" pitchFamily="34" charset="-122"/>
-                <a:cs typeface="Cambria" pitchFamily="34" charset="-120"/>
-              </a:rPr>
-              <a:t>Documentation juridique</a:t>
-            </a:r>
-            <a:endParaRPr lang="en-US" sz="1900" dirty="0"/>
-          </a:p>
-        </p:txBody>
-      </p:sp>
-      <p:sp>
-        <p:nvSpPr>
-          <p:cNvPr id="11" name="Text 9"/>
-          <p:cNvSpPr/>
-          <p:nvPr/>
-        </p:nvSpPr>
-        <p:spPr>
-          <a:xfrm>
-            <a:off x="6903720" y="3822192"/>
-            <a:ext cx="4434840" cy="320040"/>
-          </a:xfrm>
-          <a:prstGeom prst="rect">
-            <a:avLst/>
-          </a:prstGeom>
-          <a:noFill/>
-          <a:ln/>
-        </p:spPr>
-        <p:txBody>
-          <a:bodyPr wrap="square" lIns="0" tIns="0" rIns="0" bIns="0" rtlCol="0" anchor="ctr"/>
-          <a:lstStyle/>
-          <a:p>
-            <a:pPr algn="r" indent="0" marL="0">
-              <a:buNone/>
-            </a:pPr>
-            <a:r>
-              <a:rPr lang="en-US" sz="1150" b="1" dirty="0">
-                <a:solidFill>
-                  <a:srgbClr val="B07A1E"/>
-                </a:solidFill>
-                <a:latin typeface="Calibri" pitchFamily="34" charset="0"/>
-                <a:ea typeface="Calibri" pitchFamily="34" charset="-122"/>
-                <a:cs typeface="Calibri" pitchFamily="34" charset="-120"/>
-              </a:rPr>
-              <a:t>Rédigée · relecture juridique à venir</a:t>
-            </a:r>
-            <a:endParaRPr lang="en-US" sz="1150" dirty="0"/>
-          </a:p>
-        </p:txBody>
-      </p:sp>
-      <p:sp>
-        <p:nvSpPr>
-          <p:cNvPr id="12" name="Text 10"/>
-          <p:cNvSpPr/>
-          <p:nvPr/>
-        </p:nvSpPr>
-        <p:spPr>
-          <a:xfrm>
-            <a:off x="1417320" y="4206240"/>
-            <a:ext cx="10058400" cy="914400"/>
-          </a:xfrm>
-          <a:prstGeom prst="rect">
-            <a:avLst/>
-          </a:prstGeom>
-          <a:noFill/>
-          <a:ln/>
-        </p:spPr>
-        <p:txBody>
-          <a:bodyPr wrap="square" lIns="0" tIns="0" rIns="0" bIns="0" rtlCol="0" anchor="ctr"/>
-          <a:lstStyle/>
-          <a:p>
-            <a:pPr indent="0" marL="0">
-              <a:lnSpc>
-                <a:spcPts val="1600"/>
-              </a:lnSpc>
-              <a:buNone/>
-            </a:pPr>
-            <a:r>
-              <a:rPr lang="en-US" sz="1250" dirty="0">
-                <a:solidFill>
-                  <a:srgbClr val="1B2A3A"/>
-                </a:solidFill>
-                <a:latin typeface="Calibri" pitchFamily="34" charset="0"/>
-                <a:ea typeface="Calibri" pitchFamily="34" charset="-122"/>
-                <a:cs typeface="Calibri" pitchFamily="34" charset="-120"/>
-              </a:rPr>
-              <a:t>Le registre des traitements (huit traitements, établis en relisant le code) et les clauses de sous-traitance de l’article 28 sont écrits et disponibles. Ils n’ont pas encore été relus par un conseil juridique, et ne sont donc pas opposables en l’état à un tiers.</a:t>
-            </a:r>
-            <a:endParaRPr lang="en-US" sz="1250" dirty="0"/>
-          </a:p>
-        </p:txBody>
-      </p:sp>
-      <p:sp>
-        <p:nvSpPr>
-          <p:cNvPr id="13" name="Text 11"/>
-          <p:cNvSpPr/>
-          <p:nvPr/>
-        </p:nvSpPr>
-        <p:spPr>
-          <a:xfrm>
-            <a:off x="1417320" y="5166360"/>
-            <a:ext cx="10058400" cy="548640"/>
-          </a:xfrm>
-          <a:prstGeom prst="rect">
-            <a:avLst/>
-          </a:prstGeom>
-          <a:noFill/>
-          <a:ln/>
-        </p:spPr>
-        <p:txBody>
-          <a:bodyPr wrap="square" lIns="0" tIns="0" rIns="0" bIns="0" rtlCol="0" anchor="ctr"/>
-          <a:lstStyle/>
-          <a:p>
-            <a:pPr indent="0" marL="0">
-              <a:lnSpc>
-                <a:spcPts val="1500"/>
-              </a:lnSpc>
-              <a:buNone/>
-            </a:pPr>
-            <a:r>
-              <a:rPr lang="en-US" sz="1150" b="1" i="1" dirty="0">
-                <a:solidFill>
-                  <a:srgbClr val="44607F"/>
-                </a:solidFill>
-                <a:latin typeface="Calibri" pitchFamily="34" charset="0"/>
-                <a:ea typeface="Calibri" pitchFamily="34" charset="-122"/>
-                <a:cs typeface="Calibri" pitchFamily="34" charset="-120"/>
-              </a:rPr>
-              <a:t>Prochaine étape — </a:t>
-            </a:r>
-            <a:pPr indent="0" marL="0">
-              <a:lnSpc>
-                <a:spcPts val="1500"/>
-              </a:lnSpc>
-              <a:buNone/>
-            </a:pPr>
-            <a:r>
-              <a:rPr lang="en-US" sz="1150" i="1" dirty="0">
-                <a:solidFill>
-                  <a:srgbClr val="44607F"/>
-                </a:solidFill>
-                <a:latin typeface="Calibri" pitchFamily="34" charset="0"/>
-                <a:ea typeface="Calibri" pitchFamily="34" charset="-122"/>
-                <a:cs typeface="Calibri" pitchFamily="34" charset="-120"/>
-              </a:rPr>
-              <a:t>Relecture prévue avant la première mise en service contractuelle.</a:t>
-            </a:r>
-            <a:endParaRPr lang="en-US" sz="1150" dirty="0"/>
-          </a:p>
-        </p:txBody>
-      </p:sp>
-      <p:sp>
-        <p:nvSpPr>
-          <p:cNvPr id="14" name="Text 12"/>
-          <p:cNvSpPr/>
-          <p:nvPr/>
-        </p:nvSpPr>
-        <p:spPr>
-          <a:xfrm>
-            <a:off x="640080" y="5943600"/>
-            <a:ext cx="10881360" cy="365760"/>
-          </a:xfrm>
-          <a:prstGeom prst="rect">
-            <a:avLst/>
-          </a:prstGeom>
-          <a:noFill/>
-          <a:ln/>
-        </p:spPr>
-        <p:txBody>
-          <a:bodyPr wrap="square" lIns="0" tIns="0" rIns="0" bIns="0" rtlCol="0" anchor="ctr"/>
-          <a:lstStyle/>
-          <a:p>
-            <a:pPr indent="0" marL="0">
-              <a:buNone/>
-            </a:pPr>
-            <a:r>
-              <a:rPr lang="en-US" sz="1250" i="1" dirty="0">
-                <a:solidFill>
-                  <a:srgbClr val="44607F"/>
-                </a:solidFill>
-                <a:latin typeface="Calibri" pitchFamily="34" charset="0"/>
-                <a:ea typeface="Calibri" pitchFamily="34" charset="-122"/>
-                <a:cs typeface="Calibri" pitchFamily="34" charset="-120"/>
-              </a:rPr>
-              <a:t>Aucun de ces deux points ne porte sur la sécurité technique du produit.</a:t>
-            </a:r>
-            <a:endParaRPr lang="en-US" sz="1250" dirty="0"/>
           </a:p>
         </p:txBody>
       </p:sp>
@@ -3425,7 +3553,7 @@
                 <a:ea typeface="Cambria" pitchFamily="34" charset="-122"/>
                 <a:cs typeface="Cambria" pitchFamily="34" charset="-120"/>
               </a:rPr>
-              <a:t>Ce qui vous revient</a:t>
+              <a:t>Ce qui reste ouvert</a:t>
             </a:r>
             <a:endParaRPr lang="en-US" sz="3400" dirty="0"/>
           </a:p>
@@ -3464,7 +3592,7 @@
                 <a:ea typeface="Calibri" pitchFamily="34" charset="-122"/>
                 <a:cs typeface="Calibri" pitchFamily="34" charset="-120"/>
               </a:rPr>
-              <a:t>Responsable de traitement, vous avez trois actes à poser avant le premier inventaire</a:t>
+              <a:t>Deux points, aucun ne portant sur la sécurité technique</a:t>
             </a:r>
             <a:endParaRPr lang="en-US" sz="1400" dirty="0"/>
           </a:p>
@@ -3478,14 +3606,14 @@
         </p:nvSpPr>
         <p:spPr>
           <a:xfrm>
-            <a:off x="640080" y="1783080"/>
-            <a:ext cx="566928" cy="566928"/>
+            <a:off x="640080" y="1728216"/>
+            <a:ext cx="530352" cy="530352"/>
           </a:xfrm>
           <a:prstGeom prst="ellipse">
             <a:avLst/>
           </a:prstGeom>
           <a:solidFill>
-            <a:srgbClr val="12233A"/>
+            <a:srgbClr val="9B2C2C"/>
           </a:solidFill>
           <a:ln/>
         </p:spPr>
@@ -3497,7 +3625,7 @@
               <a:buNone/>
             </a:pPr>
             <a:r>
-              <a:rPr lang="en-US" sz="1700" b="1" dirty="0">
+              <a:rPr lang="en-US" sz="1200" b="1" dirty="0">
                 <a:solidFill>
                   <a:srgbClr val="FFFFFF"/>
                 </a:solidFill>
@@ -3505,9 +3633,9 @@
                 <a:ea typeface="Calibri" pitchFamily="34" charset="-122"/>
                 <a:cs typeface="Calibri" pitchFamily="34" charset="-120"/>
               </a:rPr>
-              <a:t>1</a:t>
-            </a:r>
-            <a:endParaRPr lang="en-US" sz="1700" dirty="0"/>
+              <a:t>M5</a:t>
+            </a:r>
+            <a:endParaRPr lang="en-US" sz="1200" dirty="0"/>
           </a:p>
         </p:txBody>
       </p:sp>
@@ -3519,34 +3647,34 @@
         </p:nvSpPr>
         <p:spPr>
           <a:xfrm>
-            <a:off x="1508760" y="1764792"/>
-            <a:ext cx="3657600" cy="384048"/>
-          </a:xfrm>
-          <a:prstGeom prst="rect">
-            <a:avLst/>
-          </a:prstGeom>
-          <a:noFill/>
-          <a:ln/>
-        </p:spPr>
-        <p:txBody>
-          <a:bodyPr wrap="square" lIns="0" tIns="0" rIns="0" bIns="0" rtlCol="0" anchor="ctr"/>
-          <a:lstStyle/>
-          <a:p>
-            <a:pPr indent="0" marL="0">
-              <a:buNone/>
-            </a:pPr>
-            <a:r>
-              <a:rPr lang="en-US" sz="1500" b="1" dirty="0">
+            <a:off x="1417320" y="1691640"/>
+            <a:ext cx="5394960" cy="365760"/>
+          </a:xfrm>
+          <a:prstGeom prst="rect">
+            <a:avLst/>
+          </a:prstGeom>
+          <a:noFill/>
+          <a:ln/>
+        </p:spPr>
+        <p:txBody>
+          <a:bodyPr wrap="square" lIns="0" tIns="0" rIns="0" bIns="0" rtlCol="0" anchor="ctr"/>
+          <a:lstStyle/>
+          <a:p>
+            <a:pPr indent="0" marL="0">
+              <a:buNone/>
+            </a:pPr>
+            <a:r>
+              <a:rPr lang="en-US" sz="1900" b="1" dirty="0">
                 <a:solidFill>
                   <a:srgbClr val="12233A"/>
                 </a:solidFill>
-                <a:latin typeface="Calibri" pitchFamily="34" charset="0"/>
-                <a:ea typeface="Calibri" pitchFamily="34" charset="-122"/>
-                <a:cs typeface="Calibri" pitchFamily="34" charset="-120"/>
-              </a:rPr>
-              <a:t>Informer vos salariés</a:t>
-            </a:r>
-            <a:endParaRPr lang="en-US" sz="1500" dirty="0"/>
+                <a:latin typeface="Cambria" pitchFamily="34" charset="0"/>
+                <a:ea typeface="Cambria" pitchFamily="34" charset="-122"/>
+                <a:cs typeface="Cambria" pitchFamily="34" charset="-120"/>
+              </a:rPr>
+              <a:t>Documentation juridique</a:t>
+            </a:r>
+            <a:endParaRPr lang="en-US" sz="1900" dirty="0"/>
           </a:p>
         </p:txBody>
       </p:sp>
@@ -3558,8 +3686,47 @@
         </p:nvSpPr>
         <p:spPr>
           <a:xfrm>
-            <a:off x="1508760" y="2167128"/>
-            <a:ext cx="9966960" cy="777240"/>
+            <a:off x="6903720" y="1719072"/>
+            <a:ext cx="4434840" cy="320040"/>
+          </a:xfrm>
+          <a:prstGeom prst="rect">
+            <a:avLst/>
+          </a:prstGeom>
+          <a:noFill/>
+          <a:ln/>
+        </p:spPr>
+        <p:txBody>
+          <a:bodyPr wrap="square" lIns="0" tIns="0" rIns="0" bIns="0" rtlCol="0" anchor="ctr"/>
+          <a:lstStyle/>
+          <a:p>
+            <a:pPr algn="r" indent="0" marL="0">
+              <a:buNone/>
+            </a:pPr>
+            <a:r>
+              <a:rPr lang="en-US" sz="1150" b="1" dirty="0">
+                <a:solidFill>
+                  <a:srgbClr val="9B2C2C"/>
+                </a:solidFill>
+                <a:latin typeface="Calibri" pitchFamily="34" charset="0"/>
+                <a:ea typeface="Calibri" pitchFamily="34" charset="-122"/>
+                <a:cs typeface="Calibri" pitchFamily="34" charset="-120"/>
+              </a:rPr>
+              <a:t>Rédigée · relecture à venir</a:t>
+            </a:r>
+            <a:endParaRPr lang="en-US" sz="1150" dirty="0"/>
+          </a:p>
+        </p:txBody>
+      </p:sp>
+      <p:sp>
+        <p:nvSpPr>
+          <p:cNvPr id="7" name="Text 5"/>
+          <p:cNvSpPr/>
+          <p:nvPr/>
+        </p:nvSpPr>
+        <p:spPr>
+          <a:xfrm>
+            <a:off x="1417320" y="2103120"/>
+            <a:ext cx="10058400" cy="914400"/>
           </a:xfrm>
           <a:prstGeom prst="rect">
             <a:avLst/>
@@ -3586,7 +3753,7 @@
                 <a:ea typeface="Calibri" pitchFamily="34" charset="-122"/>
                 <a:cs typeface="Calibri" pitchFamily="34" charset="-120"/>
               </a:rPr>
-              <a:t>Ce qui est observé pendant un inventaire, pourquoi, et pendant combien de temps. Nous vous remettons une note type, à adapter et à diffuser.</a:t>
+              <a:t>Le registre des traitements (huit traitements, établis en relisant le code) et les clauses de sous-traitance de l’article 28 sont écrits et disponibles. Ils n’ont pas encore été relus par un conseil juridique, et ne sont donc pas opposables en l’état à un tiers.</a:t>
             </a:r>
             <a:endParaRPr lang="en-US" sz="1250" dirty="0"/>
           </a:p>
@@ -3594,20 +3761,79 @@
       </p:sp>
       <p:sp>
         <p:nvSpPr>
-          <p:cNvPr id="7" name="Text 5"/>
-          <p:cNvSpPr/>
-          <p:nvPr/>
-        </p:nvSpPr>
-        <p:spPr>
-          <a:xfrm>
-            <a:off x="640080" y="3108960"/>
-            <a:ext cx="566928" cy="566928"/>
+          <p:cNvPr id="8" name="Text 6"/>
+          <p:cNvSpPr/>
+          <p:nvPr/>
+        </p:nvSpPr>
+        <p:spPr>
+          <a:xfrm>
+            <a:off x="1417320" y="3063240"/>
+            <a:ext cx="10058400" cy="502920"/>
+          </a:xfrm>
+          <a:prstGeom prst="rect">
+            <a:avLst/>
+          </a:prstGeom>
+          <a:noFill/>
+          <a:ln/>
+        </p:spPr>
+        <p:txBody>
+          <a:bodyPr wrap="square" lIns="0" tIns="0" rIns="0" bIns="0" rtlCol="0" anchor="ctr"/>
+          <a:lstStyle/>
+          <a:p>
+            <a:pPr indent="0" marL="0">
+              <a:lnSpc>
+                <a:spcPts val="1500"/>
+              </a:lnSpc>
+              <a:buNone/>
+            </a:pPr>
+            <a:r>
+              <a:rPr lang="en-US" sz="1150" b="1" i="1" dirty="0">
+                <a:solidFill>
+                  <a:srgbClr val="44607F"/>
+                </a:solidFill>
+                <a:latin typeface="Calibri" pitchFamily="34" charset="0"/>
+                <a:ea typeface="Calibri" pitchFamily="34" charset="-122"/>
+                <a:cs typeface="Calibri" pitchFamily="34" charset="-120"/>
+              </a:rPr>
+              <a:t>Prochaine étape — </a:t>
+            </a:r>
+            <a:pPr indent="0" marL="0">
+              <a:lnSpc>
+                <a:spcPts val="1500"/>
+              </a:lnSpc>
+              <a:buNone/>
+            </a:pPr>
+            <a:r>
+              <a:rPr lang="en-US" sz="1150" i="1" dirty="0">
+                <a:solidFill>
+                  <a:srgbClr val="44607F"/>
+                </a:solidFill>
+                <a:latin typeface="Calibri" pitchFamily="34" charset="0"/>
+                <a:ea typeface="Calibri" pitchFamily="34" charset="-122"/>
+                <a:cs typeface="Calibri" pitchFamily="34" charset="-120"/>
+              </a:rPr>
+              <a:t>Relecture prévue avant la première mise en service contractuelle.</a:t>
+            </a:r>
+            <a:endParaRPr lang="en-US" sz="1150" dirty="0"/>
+          </a:p>
+        </p:txBody>
+      </p:sp>
+      <p:sp>
+        <p:nvSpPr>
+          <p:cNvPr id="9" name="Text 7"/>
+          <p:cNvSpPr/>
+          <p:nvPr/>
+        </p:nvSpPr>
+        <p:spPr>
+          <a:xfrm>
+            <a:off x="640080" y="3831336"/>
+            <a:ext cx="530352" cy="530352"/>
           </a:xfrm>
           <a:prstGeom prst="ellipse">
             <a:avLst/>
           </a:prstGeom>
           <a:solidFill>
-            <a:srgbClr val="12233A"/>
+            <a:srgbClr val="B07A1E"/>
           </a:solidFill>
           <a:ln/>
         </p:spPr>
@@ -3619,7 +3845,7 @@
               <a:buNone/>
             </a:pPr>
             <a:r>
-              <a:rPr lang="en-US" sz="1700" b="1" dirty="0">
+              <a:rPr lang="en-US" sz="1200" b="1" dirty="0">
                 <a:solidFill>
                   <a:srgbClr val="FFFFFF"/>
                 </a:solidFill>
@@ -3627,61 +3853,100 @@
                 <a:ea typeface="Calibri" pitchFamily="34" charset="-122"/>
                 <a:cs typeface="Calibri" pitchFamily="34" charset="-120"/>
               </a:rPr>
-              <a:t>2</a:t>
-            </a:r>
-            <a:endParaRPr lang="en-US" sz="1700" dirty="0"/>
-          </a:p>
-        </p:txBody>
-      </p:sp>
-      <p:sp>
-        <p:nvSpPr>
-          <p:cNvPr id="8" name="Text 6"/>
-          <p:cNvSpPr/>
-          <p:nvPr/>
-        </p:nvSpPr>
-        <p:spPr>
-          <a:xfrm>
-            <a:off x="1508760" y="3090672"/>
-            <a:ext cx="3657600" cy="384048"/>
-          </a:xfrm>
-          <a:prstGeom prst="rect">
-            <a:avLst/>
-          </a:prstGeom>
-          <a:noFill/>
-          <a:ln/>
-        </p:spPr>
-        <p:txBody>
-          <a:bodyPr wrap="square" lIns="0" tIns="0" rIns="0" bIns="0" rtlCol="0" anchor="ctr"/>
-          <a:lstStyle/>
-          <a:p>
-            <a:pPr indent="0" marL="0">
-              <a:buNone/>
-            </a:pPr>
-            <a:r>
-              <a:rPr lang="en-US" sz="1500" b="1" dirty="0">
+              <a:t>E4</a:t>
+            </a:r>
+            <a:endParaRPr lang="en-US" sz="1200" dirty="0"/>
+          </a:p>
+        </p:txBody>
+      </p:sp>
+      <p:sp>
+        <p:nvSpPr>
+          <p:cNvPr id="10" name="Text 8"/>
+          <p:cNvSpPr/>
+          <p:nvPr/>
+        </p:nvSpPr>
+        <p:spPr>
+          <a:xfrm>
+            <a:off x="1417320" y="3794760"/>
+            <a:ext cx="5394960" cy="365760"/>
+          </a:xfrm>
+          <a:prstGeom prst="rect">
+            <a:avLst/>
+          </a:prstGeom>
+          <a:noFill/>
+          <a:ln/>
+        </p:spPr>
+        <p:txBody>
+          <a:bodyPr wrap="square" lIns="0" tIns="0" rIns="0" bIns="0" rtlCol="0" anchor="ctr"/>
+          <a:lstStyle/>
+          <a:p>
+            <a:pPr indent="0" marL="0">
+              <a:buNone/>
+            </a:pPr>
+            <a:r>
+              <a:rPr lang="en-US" sz="1900" b="1" dirty="0">
                 <a:solidFill>
                   <a:srgbClr val="12233A"/>
                 </a:solidFill>
-                <a:latin typeface="Calibri" pitchFamily="34" charset="0"/>
-                <a:ea typeface="Calibri" pitchFamily="34" charset="-122"/>
-                <a:cs typeface="Calibri" pitchFamily="34" charset="-120"/>
-              </a:rPr>
-              <a:t>Consulter votre CSE</a:t>
-            </a:r>
-            <a:endParaRPr lang="en-US" sz="1500" dirty="0"/>
-          </a:p>
-        </p:txBody>
-      </p:sp>
-      <p:sp>
-        <p:nvSpPr>
-          <p:cNvPr id="9" name="Text 7"/>
-          <p:cNvSpPr/>
-          <p:nvPr/>
-        </p:nvSpPr>
-        <p:spPr>
-          <a:xfrm>
-            <a:off x="1508760" y="3493008"/>
-            <a:ext cx="9966960" cy="777240"/>
+                <a:latin typeface="Cambria" pitchFamily="34" charset="0"/>
+                <a:ea typeface="Cambria" pitchFamily="34" charset="-122"/>
+                <a:cs typeface="Cambria" pitchFamily="34" charset="-120"/>
+              </a:rPr>
+              <a:t>Mentions légales</a:t>
+            </a:r>
+            <a:endParaRPr lang="en-US" sz="1900" dirty="0"/>
+          </a:p>
+        </p:txBody>
+      </p:sp>
+      <p:sp>
+        <p:nvSpPr>
+          <p:cNvPr id="11" name="Text 9"/>
+          <p:cNvSpPr/>
+          <p:nvPr/>
+        </p:nvSpPr>
+        <p:spPr>
+          <a:xfrm>
+            <a:off x="6903720" y="3822192"/>
+            <a:ext cx="4434840" cy="320040"/>
+          </a:xfrm>
+          <a:prstGeom prst="rect">
+            <a:avLst/>
+          </a:prstGeom>
+          <a:noFill/>
+          <a:ln/>
+        </p:spPr>
+        <p:txBody>
+          <a:bodyPr wrap="square" lIns="0" tIns="0" rIns="0" bIns="0" rtlCol="0" anchor="ctr"/>
+          <a:lstStyle/>
+          <a:p>
+            <a:pPr algn="r" indent="0" marL="0">
+              <a:buNone/>
+            </a:pPr>
+            <a:r>
+              <a:rPr lang="en-US" sz="1150" b="1" dirty="0">
+                <a:solidFill>
+                  <a:srgbClr val="B07A1E"/>
+                </a:solidFill>
+                <a:latin typeface="Calibri" pitchFamily="34" charset="0"/>
+                <a:ea typeface="Calibri" pitchFamily="34" charset="-122"/>
+                <a:cs typeface="Calibri" pitchFamily="34" charset="-120"/>
+              </a:rPr>
+              <a:t>Socle en place · activation administrative</a:t>
+            </a:r>
+            <a:endParaRPr lang="en-US" sz="1150" dirty="0"/>
+          </a:p>
+        </p:txBody>
+      </p:sp>
+      <p:sp>
+        <p:nvSpPr>
+          <p:cNvPr id="12" name="Text 10"/>
+          <p:cNvSpPr/>
+          <p:nvPr/>
+        </p:nvSpPr>
+        <p:spPr>
+          <a:xfrm>
+            <a:off x="1417320" y="4206240"/>
+            <a:ext cx="10058400" cy="914400"/>
           </a:xfrm>
           <a:prstGeom prst="rect">
             <a:avLst/>
@@ -3708,7 +3973,7 @@
                 <a:ea typeface="Calibri" pitchFamily="34" charset="-122"/>
                 <a:cs typeface="Calibri" pitchFamily="34" charset="-120"/>
               </a:rPr>
-              <a:t>Un dispositif permettant de suivre l’activité des salariés relève de l’information-consultation du comité social et économique.</a:t>
+              <a:t>La page existe et se remplit depuis un seul fichier. Elle reste volontairement discrète tant que l’activité éditrice n’est pas immatriculée : une identification à trous ne vaut pas mieux qu’aucune page.</a:t>
             </a:r>
             <a:endParaRPr lang="en-US" sz="1250" dirty="0"/>
           </a:p>
@@ -3716,94 +3981,14 @@
       </p:sp>
       <p:sp>
         <p:nvSpPr>
-          <p:cNvPr id="10" name="Text 8"/>
-          <p:cNvSpPr/>
-          <p:nvPr/>
-        </p:nvSpPr>
-        <p:spPr>
-          <a:xfrm>
-            <a:off x="640080" y="4434840"/>
-            <a:ext cx="566928" cy="566928"/>
-          </a:xfrm>
-          <a:prstGeom prst="ellipse">
-            <a:avLst/>
-          </a:prstGeom>
-          <a:solidFill>
-            <a:srgbClr val="12233A"/>
-          </a:solidFill>
-          <a:ln/>
-        </p:spPr>
-        <p:txBody>
-          <a:bodyPr wrap="square" lIns="0" tIns="0" rIns="0" bIns="0" rtlCol="0" anchor="ctr"/>
-          <a:lstStyle/>
-          <a:p>
-            <a:pPr algn="ctr" indent="0" marL="0">
-              <a:buNone/>
-            </a:pPr>
-            <a:r>
-              <a:rPr lang="en-US" sz="1700" b="1" dirty="0">
-                <a:solidFill>
-                  <a:srgbClr val="FFFFFF"/>
-                </a:solidFill>
-                <a:latin typeface="Calibri" pitchFamily="34" charset="0"/>
-                <a:ea typeface="Calibri" pitchFamily="34" charset="-122"/>
-                <a:cs typeface="Calibri" pitchFamily="34" charset="-120"/>
-              </a:rPr>
-              <a:t>3</a:t>
-            </a:r>
-            <a:endParaRPr lang="en-US" sz="1700" dirty="0"/>
-          </a:p>
-        </p:txBody>
-      </p:sp>
-      <p:sp>
-        <p:nvSpPr>
-          <p:cNvPr id="11" name="Text 9"/>
-          <p:cNvSpPr/>
-          <p:nvPr/>
-        </p:nvSpPr>
-        <p:spPr>
-          <a:xfrm>
-            <a:off x="1508760" y="4416552"/>
-            <a:ext cx="3657600" cy="384048"/>
-          </a:xfrm>
-          <a:prstGeom prst="rect">
-            <a:avLst/>
-          </a:prstGeom>
-          <a:noFill/>
-          <a:ln/>
-        </p:spPr>
-        <p:txBody>
-          <a:bodyPr wrap="square" lIns="0" tIns="0" rIns="0" bIns="0" rtlCol="0" anchor="ctr"/>
-          <a:lstStyle/>
-          <a:p>
-            <a:pPr indent="0" marL="0">
-              <a:buNone/>
-            </a:pPr>
-            <a:r>
-              <a:rPr lang="en-US" sz="1500" b="1" dirty="0">
-                <a:solidFill>
-                  <a:srgbClr val="12233A"/>
-                </a:solidFill>
-                <a:latin typeface="Calibri" pitchFamily="34" charset="0"/>
-                <a:ea typeface="Calibri" pitchFamily="34" charset="-122"/>
-                <a:cs typeface="Calibri" pitchFamily="34" charset="-120"/>
-              </a:rPr>
-              <a:t>Évaluer l’analyse d’impact</a:t>
-            </a:r>
-            <a:endParaRPr lang="en-US" sz="1500" dirty="0"/>
-          </a:p>
-        </p:txBody>
-      </p:sp>
-      <p:sp>
-        <p:nvSpPr>
-          <p:cNvPr id="12" name="Text 10"/>
-          <p:cNvSpPr/>
-          <p:nvPr/>
-        </p:nvSpPr>
-        <p:spPr>
-          <a:xfrm>
-            <a:off x="1508760" y="4818888"/>
-            <a:ext cx="9966960" cy="777240"/>
+          <p:cNvPr id="13" name="Text 11"/>
+          <p:cNvSpPr/>
+          <p:nvPr/>
+        </p:nvSpPr>
+        <p:spPr>
+          <a:xfrm>
+            <a:off x="1417320" y="5166360"/>
+            <a:ext cx="10058400" cy="502920"/>
           </a:xfrm>
           <a:prstGeom prst="rect">
             <a:avLst/>
@@ -3817,51 +4002,41 @@
           <a:p>
             <a:pPr indent="0" marL="0">
               <a:lnSpc>
-                <a:spcPts val="1600"/>
+                <a:spcPts val="1500"/>
               </a:lnSpc>
               <a:buNone/>
             </a:pPr>
             <a:r>
-              <a:rPr lang="en-US" sz="1250" dirty="0">
-                <a:solidFill>
-                  <a:srgbClr val="1B2A3A"/>
-                </a:solidFill>
-                <a:latin typeface="Calibri" pitchFamily="34" charset="0"/>
-                <a:ea typeface="Calibri" pitchFamily="34" charset="-122"/>
-                <a:cs typeface="Calibri" pitchFamily="34" charset="-120"/>
-              </a:rPr>
-              <a:t>Le suivi étant systématique et portant sur des salariés, une analyse d’impact (AIPD) est probablement requise. Notre analyse écrite vous sert de point de départ.</a:t>
-            </a:r>
-            <a:endParaRPr lang="en-US" sz="1250" dirty="0"/>
-          </a:p>
-        </p:txBody>
-      </p:sp>
-      <p:sp>
-        <p:nvSpPr>
-          <p:cNvPr id="13" name="Shape 11"/>
-          <p:cNvSpPr/>
-          <p:nvPr/>
-        </p:nvSpPr>
-        <p:spPr>
-          <a:xfrm>
-            <a:off x="640080" y="5623560"/>
-            <a:ext cx="10881360" cy="685800"/>
-          </a:xfrm>
-          <a:prstGeom prst="roundRect">
-            <a:avLst>
-              <a:gd name="adj" fmla="val 10667"/>
-            </a:avLst>
-          </a:prstGeom>
-          <a:solidFill>
-            <a:srgbClr val="F4F6F8"/>
-          </a:solidFill>
-          <a:ln w="12700">
-            <a:solidFill>
-              <a:srgbClr val="E1E7ED"/>
-            </a:solidFill>
-            <a:prstDash val="solid"/>
-          </a:ln>
-        </p:spPr>
+              <a:rPr lang="en-US" sz="1150" b="1" i="1" dirty="0">
+                <a:solidFill>
+                  <a:srgbClr val="44607F"/>
+                </a:solidFill>
+                <a:latin typeface="Calibri" pitchFamily="34" charset="0"/>
+                <a:ea typeface="Calibri" pitchFamily="34" charset="-122"/>
+                <a:cs typeface="Calibri" pitchFamily="34" charset="-120"/>
+              </a:rPr>
+              <a:t>Prochaine étape — </a:t>
+            </a:r>
+            <a:pPr indent="0" marL="0">
+              <a:lnSpc>
+                <a:spcPts val="1500"/>
+              </a:lnSpc>
+              <a:buNone/>
+            </a:pPr>
+            <a:r>
+              <a:rPr lang="en-US" sz="1150" i="1" dirty="0">
+                <a:solidFill>
+                  <a:srgbClr val="44607F"/>
+                </a:solidFill>
+                <a:latin typeface="Calibri" pitchFamily="34" charset="0"/>
+                <a:ea typeface="Calibri" pitchFamily="34" charset="-122"/>
+                <a:cs typeface="Calibri" pitchFamily="34" charset="-120"/>
+              </a:rPr>
+              <a:t>Activation en une modification, le jour de l’immatriculation.</a:t>
+            </a:r>
+            <a:endParaRPr lang="en-US" sz="1150" dirty="0"/>
+          </a:p>
+        </p:txBody>
       </p:sp>
       <p:sp>
         <p:nvSpPr>
@@ -3871,32 +4046,32 @@
         </p:nvSpPr>
         <p:spPr>
           <a:xfrm>
-            <a:off x="960120" y="5623560"/>
-            <a:ext cx="10241280" cy="685800"/>
-          </a:xfrm>
-          <a:prstGeom prst="rect">
-            <a:avLst/>
-          </a:prstGeom>
-          <a:noFill/>
-          <a:ln/>
-        </p:spPr>
-        <p:txBody>
-          <a:bodyPr wrap="square" lIns="0" tIns="0" rIns="0" bIns="0" rtlCol="0" anchor="ctr"/>
-          <a:lstStyle/>
-          <a:p>
-            <a:pPr indent="0" marL="0">
-              <a:buNone/>
-            </a:pPr>
-            <a:r>
-              <a:rPr lang="en-US" sz="1250" dirty="0">
-                <a:solidFill>
-                  <a:srgbClr val="1B2A3A"/>
-                </a:solidFill>
-                <a:latin typeface="Calibri" pitchFamily="34" charset="0"/>
-                <a:ea typeface="Calibri" pitchFamily="34" charset="-122"/>
-                <a:cs typeface="Calibri" pitchFamily="34" charset="-120"/>
-              </a:rPr>
-              <a:t>Nous fournissons les documents ; la décision et la diffusion vous appartiennent, parce que vous seul déterminez la finalité du traitement.</a:t>
+            <a:off x="640080" y="5943600"/>
+            <a:ext cx="10881360" cy="365760"/>
+          </a:xfrm>
+          <a:prstGeom prst="rect">
+            <a:avLst/>
+          </a:prstGeom>
+          <a:noFill/>
+          <a:ln/>
+        </p:spPr>
+        <p:txBody>
+          <a:bodyPr wrap="square" lIns="0" tIns="0" rIns="0" bIns="0" rtlCol="0" anchor="ctr"/>
+          <a:lstStyle/>
+          <a:p>
+            <a:pPr indent="0" marL="0">
+              <a:buNone/>
+            </a:pPr>
+            <a:r>
+              <a:rPr lang="en-US" sz="1250" i="1" dirty="0">
+                <a:solidFill>
+                  <a:srgbClr val="44607F"/>
+                </a:solidFill>
+                <a:latin typeface="Calibri" pitchFamily="34" charset="0"/>
+                <a:ea typeface="Calibri" pitchFamily="34" charset="-122"/>
+                <a:cs typeface="Calibri" pitchFamily="34" charset="-120"/>
+              </a:rPr>
+              <a:t>Aucun constat critique ni de gravité élevée ne reste ouvert sur la sécurité du produit.</a:t>
             </a:r>
             <a:endParaRPr lang="en-US" sz="1250" dirty="0"/>
           </a:p>
@@ -3960,7 +4135,7 @@
                 <a:ea typeface="Cambria" pitchFamily="34" charset="-122"/>
                 <a:cs typeface="Cambria" pitchFamily="34" charset="-120"/>
               </a:rPr>
-              <a:t>Vos questions, nos réponses</a:t>
+              <a:t>Ce qui vous revient</a:t>
             </a:r>
             <a:endParaRPr lang="en-US" sz="3400" dirty="0"/>
           </a:p>
@@ -3999,7 +4174,7 @@
                 <a:ea typeface="Calibri" pitchFamily="34" charset="-122"/>
                 <a:cs typeface="Calibri" pitchFamily="34" charset="-120"/>
               </a:rPr>
-              <a:t>Ce que nous demandent le plus souvent les services juridiques</a:t>
+              <a:t>Responsable de traitement, trois points à traiter avant le premier inventaire</a:t>
             </a:r>
             <a:endParaRPr lang="en-US" sz="1400" dirty="0"/>
           </a:p>
@@ -4013,14 +4188,14 @@
         </p:nvSpPr>
         <p:spPr>
           <a:xfrm>
-            <a:off x="640080" y="1691640"/>
-            <a:ext cx="384048" cy="384048"/>
+            <a:off x="640080" y="1783080"/>
+            <a:ext cx="566928" cy="566928"/>
           </a:xfrm>
           <a:prstGeom prst="ellipse">
             <a:avLst/>
           </a:prstGeom>
           <a:solidFill>
-            <a:srgbClr val="1F7A5C"/>
+            <a:srgbClr val="12233A"/>
           </a:solidFill>
           <a:ln/>
         </p:spPr>
@@ -4032,7 +4207,7 @@
               <a:buNone/>
             </a:pPr>
             <a:r>
-              <a:rPr lang="en-US" sz="1400" b="1" dirty="0">
+              <a:rPr lang="en-US" sz="1700" b="1" dirty="0">
                 <a:solidFill>
                   <a:srgbClr val="FFFFFF"/>
                 </a:solidFill>
@@ -4040,9 +4215,9 @@
                 <a:ea typeface="Calibri" pitchFamily="34" charset="-122"/>
                 <a:cs typeface="Calibri" pitchFamily="34" charset="-120"/>
               </a:rPr>
-              <a:t>?</a:t>
-            </a:r>
-            <a:endParaRPr lang="en-US" sz="1400" dirty="0"/>
+              <a:t>1</a:t>
+            </a:r>
+            <a:endParaRPr lang="en-US" sz="1700" dirty="0"/>
           </a:p>
         </p:txBody>
       </p:sp>
@@ -4054,8 +4229,47 @@
         </p:nvSpPr>
         <p:spPr>
           <a:xfrm>
-            <a:off x="1188720" y="1664208"/>
-            <a:ext cx="4800600" cy="457200"/>
+            <a:off x="1508760" y="1764792"/>
+            <a:ext cx="3657600" cy="384048"/>
+          </a:xfrm>
+          <a:prstGeom prst="rect">
+            <a:avLst/>
+          </a:prstGeom>
+          <a:noFill/>
+          <a:ln/>
+        </p:spPr>
+        <p:txBody>
+          <a:bodyPr wrap="square" lIns="0" tIns="0" rIns="0" bIns="0" rtlCol="0" anchor="ctr"/>
+          <a:lstStyle/>
+          <a:p>
+            <a:pPr indent="0" marL="0">
+              <a:buNone/>
+            </a:pPr>
+            <a:r>
+              <a:rPr lang="en-US" sz="1500" b="1" dirty="0">
+                <a:solidFill>
+                  <a:srgbClr val="12233A"/>
+                </a:solidFill>
+                <a:latin typeface="Calibri" pitchFamily="34" charset="0"/>
+                <a:ea typeface="Calibri" pitchFamily="34" charset="-122"/>
+                <a:cs typeface="Calibri" pitchFamily="34" charset="-120"/>
+              </a:rPr>
+              <a:t>Informer vos salariés</a:t>
+            </a:r>
+            <a:endParaRPr lang="en-US" sz="1500" dirty="0"/>
+          </a:p>
+        </p:txBody>
+      </p:sp>
+      <p:sp>
+        <p:nvSpPr>
+          <p:cNvPr id="6" name="Text 4"/>
+          <p:cNvSpPr/>
+          <p:nvPr/>
+        </p:nvSpPr>
+        <p:spPr>
+          <a:xfrm>
+            <a:off x="1508760" y="2167128"/>
+            <a:ext cx="9966960" cy="777240"/>
           </a:xfrm>
           <a:prstGeom prst="rect">
             <a:avLst/>
@@ -4069,12 +4283,92 @@
           <a:p>
             <a:pPr indent="0" marL="0">
               <a:lnSpc>
-                <a:spcPts val="1550"/>
+                <a:spcPts val="1600"/>
               </a:lnSpc>
               <a:buNone/>
             </a:pPr>
             <a:r>
-              <a:rPr lang="en-US" sz="1300" b="1" dirty="0">
+              <a:rPr lang="en-US" sz="1250" dirty="0">
+                <a:solidFill>
+                  <a:srgbClr val="1B2A3A"/>
+                </a:solidFill>
+                <a:latin typeface="Calibri" pitchFamily="34" charset="0"/>
+                <a:ea typeface="Calibri" pitchFamily="34" charset="-122"/>
+                <a:cs typeface="Calibri" pitchFamily="34" charset="-120"/>
+              </a:rPr>
+              <a:t>Ce qui est observé pendant un inventaire, pourquoi, et pendant combien de temps. Nous vous remettons une note type, à adapter et à diffuser.</a:t>
+            </a:r>
+            <a:endParaRPr lang="en-US" sz="1250" dirty="0"/>
+          </a:p>
+        </p:txBody>
+      </p:sp>
+      <p:sp>
+        <p:nvSpPr>
+          <p:cNvPr id="7" name="Text 5"/>
+          <p:cNvSpPr/>
+          <p:nvPr/>
+        </p:nvSpPr>
+        <p:spPr>
+          <a:xfrm>
+            <a:off x="640080" y="3108960"/>
+            <a:ext cx="566928" cy="566928"/>
+          </a:xfrm>
+          <a:prstGeom prst="ellipse">
+            <a:avLst/>
+          </a:prstGeom>
+          <a:solidFill>
+            <a:srgbClr val="12233A"/>
+          </a:solidFill>
+          <a:ln/>
+        </p:spPr>
+        <p:txBody>
+          <a:bodyPr wrap="square" lIns="0" tIns="0" rIns="0" bIns="0" rtlCol="0" anchor="ctr"/>
+          <a:lstStyle/>
+          <a:p>
+            <a:pPr algn="ctr" indent="0" marL="0">
+              <a:buNone/>
+            </a:pPr>
+            <a:r>
+              <a:rPr lang="en-US" sz="1700" b="1" dirty="0">
+                <a:solidFill>
+                  <a:srgbClr val="FFFFFF"/>
+                </a:solidFill>
+                <a:latin typeface="Calibri" pitchFamily="34" charset="0"/>
+                <a:ea typeface="Calibri" pitchFamily="34" charset="-122"/>
+                <a:cs typeface="Calibri" pitchFamily="34" charset="-120"/>
+              </a:rPr>
+              <a:t>2</a:t>
+            </a:r>
+            <a:endParaRPr lang="en-US" sz="1700" dirty="0"/>
+          </a:p>
+        </p:txBody>
+      </p:sp>
+      <p:sp>
+        <p:nvSpPr>
+          <p:cNvPr id="8" name="Text 6"/>
+          <p:cNvSpPr/>
+          <p:nvPr/>
+        </p:nvSpPr>
+        <p:spPr>
+          <a:xfrm>
+            <a:off x="1508760" y="3090672"/>
+            <a:ext cx="3657600" cy="384048"/>
+          </a:xfrm>
+          <a:prstGeom prst="rect">
+            <a:avLst/>
+          </a:prstGeom>
+          <a:noFill/>
+          <a:ln/>
+        </p:spPr>
+        <p:txBody>
+          <a:bodyPr wrap="square" lIns="0" tIns="0" rIns="0" bIns="0" rtlCol="0" anchor="ctr"/>
+          <a:lstStyle/>
+          <a:p>
+            <a:pPr indent="0" marL="0">
+              <a:buNone/>
+            </a:pPr>
+            <a:r>
+              <a:rPr lang="en-US" sz="1500" b="1" dirty="0">
                 <a:solidFill>
                   <a:srgbClr val="12233A"/>
                 </a:solidFill>
@@ -4082,22 +4376,22 @@
                 <a:ea typeface="Calibri" pitchFamily="34" charset="-122"/>
                 <a:cs typeface="Calibri" pitchFamily="34" charset="-120"/>
               </a:rPr>
-              <a:t>Nos données sortent-elles de l’Union européenne ?</a:t>
-            </a:r>
-            <a:endParaRPr lang="en-US" sz="1300" dirty="0"/>
-          </a:p>
-        </p:txBody>
-      </p:sp>
-      <p:sp>
-        <p:nvSpPr>
-          <p:cNvPr id="6" name="Text 4"/>
-          <p:cNvSpPr/>
-          <p:nvPr/>
-        </p:nvSpPr>
-        <p:spPr>
-          <a:xfrm>
-            <a:off x="1188720" y="2148840"/>
-            <a:ext cx="4800600" cy="868680"/>
+              <a:t>Informer votre CSE</a:t>
+            </a:r>
+            <a:endParaRPr lang="en-US" sz="1500" dirty="0"/>
+          </a:p>
+        </p:txBody>
+      </p:sp>
+      <p:sp>
+        <p:nvSpPr>
+          <p:cNvPr id="9" name="Text 7"/>
+          <p:cNvSpPr/>
+          <p:nvPr/>
+        </p:nvSpPr>
+        <p:spPr>
+          <a:xfrm>
+            <a:off x="1508760" y="3493008"/>
+            <a:ext cx="9966960" cy="777240"/>
           </a:xfrm>
           <a:prstGeom prst="rect">
             <a:avLst/>
@@ -4111,12 +4405,12 @@
           <a:p>
             <a:pPr indent="0" marL="0">
               <a:lnSpc>
-                <a:spcPts val="1500"/>
+                <a:spcPts val="1600"/>
               </a:lnSpc>
               <a:buNone/>
             </a:pPr>
             <a:r>
-              <a:rPr lang="en-US" sz="1150" dirty="0">
+              <a:rPr lang="en-US" sz="1250" dirty="0">
                 <a:solidFill>
                   <a:srgbClr val="1B2A3A"/>
                 </a:solidFill>
@@ -4124,28 +4418,28 @@
                 <a:ea typeface="Calibri" pitchFamily="34" charset="-122"/>
                 <a:cs typeface="Calibri" pitchFamily="34" charset="-120"/>
               </a:rPr>
-              <a:t>La base est en Irlande. Certains prestataires sont établis aux États-Unis ; tous sont nommés dans notre politique.</a:t>
-            </a:r>
-            <a:endParaRPr lang="en-US" sz="1150" dirty="0"/>
-          </a:p>
-        </p:txBody>
-      </p:sp>
-      <p:sp>
-        <p:nvSpPr>
-          <p:cNvPr id="7" name="Text 5"/>
-          <p:cNvSpPr/>
-          <p:nvPr/>
-        </p:nvSpPr>
-        <p:spPr>
-          <a:xfrm>
-            <a:off x="6263640" y="1691640"/>
-            <a:ext cx="384048" cy="384048"/>
+              <a:t>Le suivi en direct ayant été retiré, l’obligation de consultation se discute — mais informer le comité social et économique coûte peu et sécurise la démarche.</a:t>
+            </a:r>
+            <a:endParaRPr lang="en-US" sz="1250" dirty="0"/>
+          </a:p>
+        </p:txBody>
+      </p:sp>
+      <p:sp>
+        <p:nvSpPr>
+          <p:cNvPr id="10" name="Text 8"/>
+          <p:cNvSpPr/>
+          <p:nvPr/>
+        </p:nvSpPr>
+        <p:spPr>
+          <a:xfrm>
+            <a:off x="640080" y="4434840"/>
+            <a:ext cx="566928" cy="566928"/>
           </a:xfrm>
           <a:prstGeom prst="ellipse">
             <a:avLst/>
           </a:prstGeom>
           <a:solidFill>
-            <a:srgbClr val="1F7A5C"/>
+            <a:srgbClr val="12233A"/>
           </a:solidFill>
           <a:ln/>
         </p:spPr>
@@ -4157,7 +4451,7 @@
               <a:buNone/>
             </a:pPr>
             <a:r>
-              <a:rPr lang="en-US" sz="1400" b="1" dirty="0">
+              <a:rPr lang="en-US" sz="1700" b="1" dirty="0">
                 <a:solidFill>
                   <a:srgbClr val="FFFFFF"/>
                 </a:solidFill>
@@ -4165,22 +4459,61 @@
                 <a:ea typeface="Calibri" pitchFamily="34" charset="-122"/>
                 <a:cs typeface="Calibri" pitchFamily="34" charset="-120"/>
               </a:rPr>
-              <a:t>?</a:t>
-            </a:r>
-            <a:endParaRPr lang="en-US" sz="1400" dirty="0"/>
-          </a:p>
-        </p:txBody>
-      </p:sp>
-      <p:sp>
-        <p:nvSpPr>
-          <p:cNvPr id="8" name="Text 6"/>
-          <p:cNvSpPr/>
-          <p:nvPr/>
-        </p:nvSpPr>
-        <p:spPr>
-          <a:xfrm>
-            <a:off x="6812280" y="1664208"/>
-            <a:ext cx="4800600" cy="457200"/>
+              <a:t>3</a:t>
+            </a:r>
+            <a:endParaRPr lang="en-US" sz="1700" dirty="0"/>
+          </a:p>
+        </p:txBody>
+      </p:sp>
+      <p:sp>
+        <p:nvSpPr>
+          <p:cNvPr id="11" name="Text 9"/>
+          <p:cNvSpPr/>
+          <p:nvPr/>
+        </p:nvSpPr>
+        <p:spPr>
+          <a:xfrm>
+            <a:off x="1508760" y="4416552"/>
+            <a:ext cx="3657600" cy="384048"/>
+          </a:xfrm>
+          <a:prstGeom prst="rect">
+            <a:avLst/>
+          </a:prstGeom>
+          <a:noFill/>
+          <a:ln/>
+        </p:spPr>
+        <p:txBody>
+          <a:bodyPr wrap="square" lIns="0" tIns="0" rIns="0" bIns="0" rtlCol="0" anchor="ctr"/>
+          <a:lstStyle/>
+          <a:p>
+            <a:pPr indent="0" marL="0">
+              <a:buNone/>
+            </a:pPr>
+            <a:r>
+              <a:rPr lang="en-US" sz="1500" b="1" dirty="0">
+                <a:solidFill>
+                  <a:srgbClr val="12233A"/>
+                </a:solidFill>
+                <a:latin typeface="Calibri" pitchFamily="34" charset="0"/>
+                <a:ea typeface="Calibri" pitchFamily="34" charset="-122"/>
+                <a:cs typeface="Calibri" pitchFamily="34" charset="-120"/>
+              </a:rPr>
+              <a:t>Écarter l’analyse d’impact par écrit</a:t>
+            </a:r>
+            <a:endParaRPr lang="en-US" sz="1500" dirty="0"/>
+          </a:p>
+        </p:txBody>
+      </p:sp>
+      <p:sp>
+        <p:nvSpPr>
+          <p:cNvPr id="12" name="Text 10"/>
+          <p:cNvSpPr/>
+          <p:nvPr/>
+        </p:nvSpPr>
+        <p:spPr>
+          <a:xfrm>
+            <a:off x="1508760" y="4818888"/>
+            <a:ext cx="9966960" cy="777240"/>
           </a:xfrm>
           <a:prstGeom prst="rect">
             <a:avLst/>
@@ -4194,54 +4527,12 @@
           <a:p>
             <a:pPr indent="0" marL="0">
               <a:lnSpc>
-                <a:spcPts val="1550"/>
+                <a:spcPts val="1600"/>
               </a:lnSpc>
               <a:buNone/>
             </a:pPr>
             <a:r>
-              <a:rPr lang="en-US" sz="1300" b="1" dirty="0">
-                <a:solidFill>
-                  <a:srgbClr val="12233A"/>
-                </a:solidFill>
-                <a:latin typeface="Calibri" pitchFamily="34" charset="0"/>
-                <a:ea typeface="Calibri" pitchFamily="34" charset="-122"/>
-                <a:cs typeface="Calibri" pitchFamily="34" charset="-120"/>
-              </a:rPr>
-              <a:t>Un magasin peut-il voir les inventaires d’un autre ?</a:t>
-            </a:r>
-            <a:endParaRPr lang="en-US" sz="1300" dirty="0"/>
-          </a:p>
-        </p:txBody>
-      </p:sp>
-      <p:sp>
-        <p:nvSpPr>
-          <p:cNvPr id="9" name="Text 7"/>
-          <p:cNvSpPr/>
-          <p:nvPr/>
-        </p:nvSpPr>
-        <p:spPr>
-          <a:xfrm>
-            <a:off x="6812280" y="2148840"/>
-            <a:ext cx="4800600" cy="868680"/>
-          </a:xfrm>
-          <a:prstGeom prst="rect">
-            <a:avLst/>
-          </a:prstGeom>
-          <a:noFill/>
-          <a:ln/>
-        </p:spPr>
-        <p:txBody>
-          <a:bodyPr wrap="square" lIns="0" tIns="0" rIns="0" bIns="0" rtlCol="0" anchor="ctr"/>
-          <a:lstStyle/>
-          <a:p>
-            <a:pPr indent="0" marL="0">
-              <a:lnSpc>
-                <a:spcPts val="1500"/>
-              </a:lnSpc>
-              <a:buNone/>
-            </a:pPr>
-            <a:r>
-              <a:rPr lang="en-US" sz="1150" dirty="0">
+              <a:rPr lang="en-US" sz="1250" dirty="0">
                 <a:solidFill>
                   <a:srgbClr val="1B2A3A"/>
                 </a:solidFill>
@@ -4249,124 +4540,65 @@
                 <a:ea typeface="Calibri" pitchFamily="34" charset="-122"/>
                 <a:cs typeface="Calibri" pitchFamily="34" charset="-120"/>
               </a:rPr>
-              <a:t>Non. Le cloisonnement est appliqué par la base de données ligne par ligne, indépendamment de l’application.</a:t>
-            </a:r>
-            <a:endParaRPr lang="en-US" sz="1150" dirty="0"/>
-          </a:p>
-        </p:txBody>
-      </p:sp>
-      <p:sp>
-        <p:nvSpPr>
-          <p:cNvPr id="10" name="Text 8"/>
-          <p:cNvSpPr/>
-          <p:nvPr/>
-        </p:nvSpPr>
-        <p:spPr>
-          <a:xfrm>
-            <a:off x="640080" y="3154680"/>
-            <a:ext cx="384048" cy="384048"/>
-          </a:xfrm>
-          <a:prstGeom prst="ellipse">
-            <a:avLst/>
+              <a:t>Un seul critère sur six reste rempli : l’AIPD n’est en principe plus requise. Une AIPD écartée se motive par écrit — elle ne se déduit pas d’un silence. Notre analyse vous sert de base.</a:t>
+            </a:r>
+            <a:endParaRPr lang="en-US" sz="1250" dirty="0"/>
+          </a:p>
+        </p:txBody>
+      </p:sp>
+      <p:sp>
+        <p:nvSpPr>
+          <p:cNvPr id="13" name="Shape 11"/>
+          <p:cNvSpPr/>
+          <p:nvPr/>
+        </p:nvSpPr>
+        <p:spPr>
+          <a:xfrm>
+            <a:off x="640080" y="5623560"/>
+            <a:ext cx="10881360" cy="685800"/>
+          </a:xfrm>
+          <a:prstGeom prst="roundRect">
+            <a:avLst>
+              <a:gd name="adj" fmla="val 10667"/>
+            </a:avLst>
           </a:prstGeom>
           <a:solidFill>
-            <a:srgbClr val="1F7A5C"/>
+            <a:srgbClr val="F4F6F8"/>
           </a:solidFill>
-          <a:ln/>
-        </p:spPr>
-        <p:txBody>
-          <a:bodyPr wrap="square" lIns="0" tIns="0" rIns="0" bIns="0" rtlCol="0" anchor="ctr"/>
-          <a:lstStyle/>
-          <a:p>
-            <a:pPr algn="ctr" indent="0" marL="0">
-              <a:buNone/>
-            </a:pPr>
-            <a:r>
-              <a:rPr lang="en-US" sz="1400" b="1" dirty="0">
-                <a:solidFill>
-                  <a:srgbClr val="FFFFFF"/>
-                </a:solidFill>
-                <a:latin typeface="Calibri" pitchFamily="34" charset="0"/>
-                <a:ea typeface="Calibri" pitchFamily="34" charset="-122"/>
-                <a:cs typeface="Calibri" pitchFamily="34" charset="-120"/>
-              </a:rPr>
-              <a:t>?</a:t>
-            </a:r>
-            <a:endParaRPr lang="en-US" sz="1400" dirty="0"/>
-          </a:p>
-        </p:txBody>
-      </p:sp>
-      <p:sp>
-        <p:nvSpPr>
-          <p:cNvPr id="11" name="Text 9"/>
-          <p:cNvSpPr/>
-          <p:nvPr/>
-        </p:nvSpPr>
-        <p:spPr>
-          <a:xfrm>
-            <a:off x="1188720" y="3127248"/>
-            <a:ext cx="4800600" cy="457200"/>
-          </a:xfrm>
-          <a:prstGeom prst="rect">
-            <a:avLst/>
-          </a:prstGeom>
-          <a:noFill/>
-          <a:ln/>
-        </p:spPr>
-        <p:txBody>
-          <a:bodyPr wrap="square" lIns="0" tIns="0" rIns="0" bIns="0" rtlCol="0" anchor="ctr"/>
-          <a:lstStyle/>
-          <a:p>
-            <a:pPr indent="0" marL="0">
-              <a:lnSpc>
-                <a:spcPts val="1550"/>
-              </a:lnSpc>
-              <a:buNone/>
-            </a:pPr>
-            <a:r>
-              <a:rPr lang="en-US" sz="1300" b="1" dirty="0">
-                <a:solidFill>
-                  <a:srgbClr val="12233A"/>
-                </a:solidFill>
-                <a:latin typeface="Calibri" pitchFamily="34" charset="0"/>
-                <a:ea typeface="Calibri" pitchFamily="34" charset="-122"/>
-                <a:cs typeface="Calibri" pitchFamily="34" charset="-120"/>
-              </a:rPr>
-              <a:t>Utilisez-vous des cookies ou du traçage ?</a:t>
-            </a:r>
-            <a:endParaRPr lang="en-US" sz="1300" dirty="0"/>
-          </a:p>
-        </p:txBody>
-      </p:sp>
-      <p:sp>
-        <p:nvSpPr>
-          <p:cNvPr id="12" name="Text 10"/>
-          <p:cNvSpPr/>
-          <p:nvPr/>
-        </p:nvSpPr>
-        <p:spPr>
-          <a:xfrm>
-            <a:off x="1188720" y="3611880"/>
-            <a:ext cx="4800600" cy="868680"/>
-          </a:xfrm>
-          <a:prstGeom prst="rect">
-            <a:avLst/>
-          </a:prstGeom>
-          <a:noFill/>
-          <a:ln/>
-        </p:spPr>
-        <p:txBody>
-          <a:bodyPr wrap="square" lIns="0" tIns="0" rIns="0" bIns="0" rtlCol="0" anchor="ctr"/>
-          <a:lstStyle/>
-          <a:p>
-            <a:pPr indent="0" marL="0">
-              <a:lnSpc>
-                <a:spcPts val="1500"/>
-              </a:lnSpc>
-              <a:buNone/>
-            </a:pPr>
-            <a:r>
-              <a:rPr lang="en-US" sz="1150" dirty="0">
+          <a:ln w="12700">
+            <a:solidFill>
+              <a:srgbClr val="E1E7ED"/>
+            </a:solidFill>
+            <a:prstDash val="solid"/>
+          </a:ln>
+        </p:spPr>
+      </p:sp>
+      <p:sp>
+        <p:nvSpPr>
+          <p:cNvPr id="14" name="Text 12"/>
+          <p:cNvSpPr/>
+          <p:nvPr/>
+        </p:nvSpPr>
+        <p:spPr>
+          <a:xfrm>
+            <a:off x="960120" y="5623560"/>
+            <a:ext cx="10241280" cy="685800"/>
+          </a:xfrm>
+          <a:prstGeom prst="rect">
+            <a:avLst/>
+          </a:prstGeom>
+          <a:noFill/>
+          <a:ln/>
+        </p:spPr>
+        <p:txBody>
+          <a:bodyPr wrap="square" lIns="0" tIns="0" rIns="0" bIns="0" rtlCol="0" anchor="ctr"/>
+          <a:lstStyle/>
+          <a:p>
+            <a:pPr indent="0" marL="0">
+              <a:buNone/>
+            </a:pPr>
+            <a:r>
+              <a:rPr lang="en-US" sz="1250" dirty="0">
                 <a:solidFill>
                   <a:srgbClr val="1B2A3A"/>
                 </a:solidFill>
@@ -4374,384 +4606,9 @@
                 <a:ea typeface="Calibri" pitchFamily="34" charset="-122"/>
                 <a:cs typeface="Calibri" pitchFamily="34" charset="-120"/>
               </a:rPr>
-              <a:t>Aucun. Ni mesure d’audience, ni publicité, ni bandeau de consentement.</a:t>
-            </a:r>
-            <a:endParaRPr lang="en-US" sz="1150" dirty="0"/>
-          </a:p>
-        </p:txBody>
-      </p:sp>
-      <p:sp>
-        <p:nvSpPr>
-          <p:cNvPr id="13" name="Text 11"/>
-          <p:cNvSpPr/>
-          <p:nvPr/>
-        </p:nvSpPr>
-        <p:spPr>
-          <a:xfrm>
-            <a:off x="6263640" y="3154680"/>
-            <a:ext cx="384048" cy="384048"/>
-          </a:xfrm>
-          <a:prstGeom prst="ellipse">
-            <a:avLst/>
-          </a:prstGeom>
-          <a:solidFill>
-            <a:srgbClr val="1F7A5C"/>
-          </a:solidFill>
-          <a:ln/>
-        </p:spPr>
-        <p:txBody>
-          <a:bodyPr wrap="square" lIns="0" tIns="0" rIns="0" bIns="0" rtlCol="0" anchor="ctr"/>
-          <a:lstStyle/>
-          <a:p>
-            <a:pPr algn="ctr" indent="0" marL="0">
-              <a:buNone/>
-            </a:pPr>
-            <a:r>
-              <a:rPr lang="en-US" sz="1400" b="1" dirty="0">
-                <a:solidFill>
-                  <a:srgbClr val="FFFFFF"/>
-                </a:solidFill>
-                <a:latin typeface="Calibri" pitchFamily="34" charset="0"/>
-                <a:ea typeface="Calibri" pitchFamily="34" charset="-122"/>
-                <a:cs typeface="Calibri" pitchFamily="34" charset="-120"/>
-              </a:rPr>
-              <a:t>?</a:t>
-            </a:r>
-            <a:endParaRPr lang="en-US" sz="1400" dirty="0"/>
-          </a:p>
-        </p:txBody>
-      </p:sp>
-      <p:sp>
-        <p:nvSpPr>
-          <p:cNvPr id="14" name="Text 12"/>
-          <p:cNvSpPr/>
-          <p:nvPr/>
-        </p:nvSpPr>
-        <p:spPr>
-          <a:xfrm>
-            <a:off x="6812280" y="3127248"/>
-            <a:ext cx="4800600" cy="457200"/>
-          </a:xfrm>
-          <a:prstGeom prst="rect">
-            <a:avLst/>
-          </a:prstGeom>
-          <a:noFill/>
-          <a:ln/>
-        </p:spPr>
-        <p:txBody>
-          <a:bodyPr wrap="square" lIns="0" tIns="0" rIns="0" bIns="0" rtlCol="0" anchor="ctr"/>
-          <a:lstStyle/>
-          <a:p>
-            <a:pPr indent="0" marL="0">
-              <a:lnSpc>
-                <a:spcPts val="1550"/>
-              </a:lnSpc>
-              <a:buNone/>
-            </a:pPr>
-            <a:r>
-              <a:rPr lang="en-US" sz="1300" b="1" dirty="0">
-                <a:solidFill>
-                  <a:srgbClr val="12233A"/>
-                </a:solidFill>
-                <a:latin typeface="Calibri" pitchFamily="34" charset="0"/>
-                <a:ea typeface="Calibri" pitchFamily="34" charset="-122"/>
-                <a:cs typeface="Calibri" pitchFamily="34" charset="-120"/>
-              </a:rPr>
-              <a:t>Que se passe-t-il en cas de violation de données ?</a:t>
-            </a:r>
-            <a:endParaRPr lang="en-US" sz="1300" dirty="0"/>
-          </a:p>
-        </p:txBody>
-      </p:sp>
-      <p:sp>
-        <p:nvSpPr>
-          <p:cNvPr id="15" name="Text 13"/>
-          <p:cNvSpPr/>
-          <p:nvPr/>
-        </p:nvSpPr>
-        <p:spPr>
-          <a:xfrm>
-            <a:off x="6812280" y="3611880"/>
-            <a:ext cx="4800600" cy="868680"/>
-          </a:xfrm>
-          <a:prstGeom prst="rect">
-            <a:avLst/>
-          </a:prstGeom>
-          <a:noFill/>
-          <a:ln/>
-        </p:spPr>
-        <p:txBody>
-          <a:bodyPr wrap="square" lIns="0" tIns="0" rIns="0" bIns="0" rtlCol="0" anchor="ctr"/>
-          <a:lstStyle/>
-          <a:p>
-            <a:pPr indent="0" marL="0">
-              <a:lnSpc>
-                <a:spcPts val="1500"/>
-              </a:lnSpc>
-              <a:buNone/>
-            </a:pPr>
-            <a:r>
-              <a:rPr lang="en-US" sz="1150" dirty="0">
-                <a:solidFill>
-                  <a:srgbClr val="1B2A3A"/>
-                </a:solidFill>
-                <a:latin typeface="Calibri" pitchFamily="34" charset="0"/>
-                <a:ea typeface="Calibri" pitchFamily="34" charset="-122"/>
-                <a:cs typeface="Calibri" pitchFamily="34" charset="-120"/>
-              </a:rPr>
-              <a:t>Procédure écrite. Nous vous alertons sans délai ; sur vos données, c’est vous qui notifiez la CNIL sous 72 heures.</a:t>
-            </a:r>
-            <a:endParaRPr lang="en-US" sz="1150" dirty="0"/>
-          </a:p>
-        </p:txBody>
-      </p:sp>
-      <p:sp>
-        <p:nvSpPr>
-          <p:cNvPr id="16" name="Text 14"/>
-          <p:cNvSpPr/>
-          <p:nvPr/>
-        </p:nvSpPr>
-        <p:spPr>
-          <a:xfrm>
-            <a:off x="640080" y="4617720"/>
-            <a:ext cx="384048" cy="384048"/>
-          </a:xfrm>
-          <a:prstGeom prst="ellipse">
-            <a:avLst/>
-          </a:prstGeom>
-          <a:solidFill>
-            <a:srgbClr val="1F7A5C"/>
-          </a:solidFill>
-          <a:ln/>
-        </p:spPr>
-        <p:txBody>
-          <a:bodyPr wrap="square" lIns="0" tIns="0" rIns="0" bIns="0" rtlCol="0" anchor="ctr"/>
-          <a:lstStyle/>
-          <a:p>
-            <a:pPr algn="ctr" indent="0" marL="0">
-              <a:buNone/>
-            </a:pPr>
-            <a:r>
-              <a:rPr lang="en-US" sz="1400" b="1" dirty="0">
-                <a:solidFill>
-                  <a:srgbClr val="FFFFFF"/>
-                </a:solidFill>
-                <a:latin typeface="Calibri" pitchFamily="34" charset="0"/>
-                <a:ea typeface="Calibri" pitchFamily="34" charset="-122"/>
-                <a:cs typeface="Calibri" pitchFamily="34" charset="-120"/>
-              </a:rPr>
-              <a:t>?</a:t>
-            </a:r>
-            <a:endParaRPr lang="en-US" sz="1400" dirty="0"/>
-          </a:p>
-        </p:txBody>
-      </p:sp>
-      <p:sp>
-        <p:nvSpPr>
-          <p:cNvPr id="17" name="Text 15"/>
-          <p:cNvSpPr/>
-          <p:nvPr/>
-        </p:nvSpPr>
-        <p:spPr>
-          <a:xfrm>
-            <a:off x="1188720" y="4590288"/>
-            <a:ext cx="4800600" cy="457200"/>
-          </a:xfrm>
-          <a:prstGeom prst="rect">
-            <a:avLst/>
-          </a:prstGeom>
-          <a:noFill/>
-          <a:ln/>
-        </p:spPr>
-        <p:txBody>
-          <a:bodyPr wrap="square" lIns="0" tIns="0" rIns="0" bIns="0" rtlCol="0" anchor="ctr"/>
-          <a:lstStyle/>
-          <a:p>
-            <a:pPr indent="0" marL="0">
-              <a:lnSpc>
-                <a:spcPts val="1550"/>
-              </a:lnSpc>
-              <a:buNone/>
-            </a:pPr>
-            <a:r>
-              <a:rPr lang="en-US" sz="1300" b="1" dirty="0">
-                <a:solidFill>
-                  <a:srgbClr val="12233A"/>
-                </a:solidFill>
-                <a:latin typeface="Calibri" pitchFamily="34" charset="0"/>
-                <a:ea typeface="Calibri" pitchFamily="34" charset="-122"/>
-                <a:cs typeface="Calibri" pitchFamily="34" charset="-120"/>
-              </a:rPr>
-              <a:t>Un salarié peut-il récupérer ou effacer ses données ?</a:t>
-            </a:r>
-            <a:endParaRPr lang="en-US" sz="1300" dirty="0"/>
-          </a:p>
-        </p:txBody>
-      </p:sp>
-      <p:sp>
-        <p:nvSpPr>
-          <p:cNvPr id="18" name="Text 16"/>
-          <p:cNvSpPr/>
-          <p:nvPr/>
-        </p:nvSpPr>
-        <p:spPr>
-          <a:xfrm>
-            <a:off x="1188720" y="5074920"/>
-            <a:ext cx="4800600" cy="868680"/>
-          </a:xfrm>
-          <a:prstGeom prst="rect">
-            <a:avLst/>
-          </a:prstGeom>
-          <a:noFill/>
-          <a:ln/>
-        </p:spPr>
-        <p:txBody>
-          <a:bodyPr wrap="square" lIns="0" tIns="0" rIns="0" bIns="0" rtlCol="0" anchor="ctr"/>
-          <a:lstStyle/>
-          <a:p>
-            <a:pPr indent="0" marL="0">
-              <a:lnSpc>
-                <a:spcPts val="1500"/>
-              </a:lnSpc>
-              <a:buNone/>
-            </a:pPr>
-            <a:r>
-              <a:rPr lang="en-US" sz="1150" dirty="0">
-                <a:solidFill>
-                  <a:srgbClr val="1B2A3A"/>
-                </a:solidFill>
-                <a:latin typeface="Calibri" pitchFamily="34" charset="0"/>
-                <a:ea typeface="Calibri" pitchFamily="34" charset="-122"/>
-                <a:cs typeface="Calibri" pitchFamily="34" charset="-120"/>
-              </a:rPr>
-              <a:t>Oui : export en un clic depuis son compte, et suppression sur demande — les comptages sont alors anonymisés, pas détruits.</a:t>
-            </a:r>
-            <a:endParaRPr lang="en-US" sz="1150" dirty="0"/>
-          </a:p>
-        </p:txBody>
-      </p:sp>
-      <p:sp>
-        <p:nvSpPr>
-          <p:cNvPr id="19" name="Text 17"/>
-          <p:cNvSpPr/>
-          <p:nvPr/>
-        </p:nvSpPr>
-        <p:spPr>
-          <a:xfrm>
-            <a:off x="6263640" y="4617720"/>
-            <a:ext cx="384048" cy="384048"/>
-          </a:xfrm>
-          <a:prstGeom prst="ellipse">
-            <a:avLst/>
-          </a:prstGeom>
-          <a:solidFill>
-            <a:srgbClr val="1F7A5C"/>
-          </a:solidFill>
-          <a:ln/>
-        </p:spPr>
-        <p:txBody>
-          <a:bodyPr wrap="square" lIns="0" tIns="0" rIns="0" bIns="0" rtlCol="0" anchor="ctr"/>
-          <a:lstStyle/>
-          <a:p>
-            <a:pPr algn="ctr" indent="0" marL="0">
-              <a:buNone/>
-            </a:pPr>
-            <a:r>
-              <a:rPr lang="en-US" sz="1400" b="1" dirty="0">
-                <a:solidFill>
-                  <a:srgbClr val="FFFFFF"/>
-                </a:solidFill>
-                <a:latin typeface="Calibri" pitchFamily="34" charset="0"/>
-                <a:ea typeface="Calibri" pitchFamily="34" charset="-122"/>
-                <a:cs typeface="Calibri" pitchFamily="34" charset="-120"/>
-              </a:rPr>
-              <a:t>?</a:t>
-            </a:r>
-            <a:endParaRPr lang="en-US" sz="1400" dirty="0"/>
-          </a:p>
-        </p:txBody>
-      </p:sp>
-      <p:sp>
-        <p:nvSpPr>
-          <p:cNvPr id="20" name="Text 18"/>
-          <p:cNvSpPr/>
-          <p:nvPr/>
-        </p:nvSpPr>
-        <p:spPr>
-          <a:xfrm>
-            <a:off x="6812280" y="4590288"/>
-            <a:ext cx="4800600" cy="457200"/>
-          </a:xfrm>
-          <a:prstGeom prst="rect">
-            <a:avLst/>
-          </a:prstGeom>
-          <a:noFill/>
-          <a:ln/>
-        </p:spPr>
-        <p:txBody>
-          <a:bodyPr wrap="square" lIns="0" tIns="0" rIns="0" bIns="0" rtlCol="0" anchor="ctr"/>
-          <a:lstStyle/>
-          <a:p>
-            <a:pPr indent="0" marL="0">
-              <a:lnSpc>
-                <a:spcPts val="1550"/>
-              </a:lnSpc>
-              <a:buNone/>
-            </a:pPr>
-            <a:r>
-              <a:rPr lang="en-US" sz="1300" b="1" dirty="0">
-                <a:solidFill>
-                  <a:srgbClr val="12233A"/>
-                </a:solidFill>
-                <a:latin typeface="Calibri" pitchFamily="34" charset="0"/>
-                <a:ea typeface="Calibri" pitchFamily="34" charset="-122"/>
-                <a:cs typeface="Calibri" pitchFamily="34" charset="-120"/>
-              </a:rPr>
-              <a:t>Que devient notre inventaire si nous partons ?</a:t>
-            </a:r>
-            <a:endParaRPr lang="en-US" sz="1300" dirty="0"/>
-          </a:p>
-        </p:txBody>
-      </p:sp>
-      <p:sp>
-        <p:nvSpPr>
-          <p:cNvPr id="21" name="Text 19"/>
-          <p:cNvSpPr/>
-          <p:nvPr/>
-        </p:nvSpPr>
-        <p:spPr>
-          <a:xfrm>
-            <a:off x="6812280" y="5074920"/>
-            <a:ext cx="4800600" cy="868680"/>
-          </a:xfrm>
-          <a:prstGeom prst="rect">
-            <a:avLst/>
-          </a:prstGeom>
-          <a:noFill/>
-          <a:ln/>
-        </p:spPr>
-        <p:txBody>
-          <a:bodyPr wrap="square" lIns="0" tIns="0" rIns="0" bIns="0" rtlCol="0" anchor="ctr"/>
-          <a:lstStyle/>
-          <a:p>
-            <a:pPr indent="0" marL="0">
-              <a:lnSpc>
-                <a:spcPts val="1500"/>
-              </a:lnSpc>
-              <a:buNone/>
-            </a:pPr>
-            <a:r>
-              <a:rPr lang="en-US" sz="1150" dirty="0">
-                <a:solidFill>
-                  <a:srgbClr val="1B2A3A"/>
-                </a:solidFill>
-                <a:latin typeface="Calibri" pitchFamily="34" charset="0"/>
-                <a:ea typeface="Calibri" pitchFamily="34" charset="-122"/>
-                <a:cs typeface="Calibri" pitchFamily="34" charset="-120"/>
-              </a:rPr>
-              <a:t>Les rapports restent exportables en Excel et CSV à tout moment, sans intervention de notre part.</a:t>
-            </a:r>
-            <a:endParaRPr lang="en-US" sz="1150" dirty="0"/>
+              <a:t>Nous fournissons les documents ; la décision et la diffusion vous appartiennent, parce que vous seul déterminez la finalité du traitement.</a:t>
+            </a:r>
+            <a:endParaRPr lang="en-US" sz="1250" dirty="0"/>
           </a:p>
         </p:txBody>
       </p:sp>
@@ -4766,6 +4623,859 @@
 <file path=ppt/slides/slide13.xml><?xml version="1.0" encoding="utf-8"?>
 <p:sld xmlns:a="http://schemas.openxmlformats.org/drawingml/2006/main" xmlns:r="http://schemas.openxmlformats.org/officeDocument/2006/relationships" xmlns:p="http://schemas.openxmlformats.org/presentationml/2006/main">
   <p:cSld name="Slide 13">
+    <p:spTree>
+      <p:nvGrpSpPr>
+        <p:cNvPr id="1" name=""/>
+        <p:cNvGrpSpPr/>
+        <p:nvPr/>
+      </p:nvGrpSpPr>
+      <p:grpSpPr>
+        <a:xfrm>
+          <a:off x="0" y="0"/>
+          <a:ext cx="0" cy="0"/>
+          <a:chOff x="0" y="0"/>
+          <a:chExt cx="0" cy="0"/>
+        </a:xfrm>
+      </p:grpSpPr>
+      <p:sp>
+        <p:nvSpPr>
+          <p:cNvPr id="2" name="Text 0"/>
+          <p:cNvSpPr/>
+          <p:nvPr/>
+        </p:nvSpPr>
+        <p:spPr>
+          <a:xfrm>
+            <a:off x="640080" y="411480"/>
+            <a:ext cx="10881360" cy="594360"/>
+          </a:xfrm>
+          <a:prstGeom prst="rect">
+            <a:avLst/>
+          </a:prstGeom>
+          <a:noFill/>
+          <a:ln/>
+        </p:spPr>
+        <p:txBody>
+          <a:bodyPr wrap="square" lIns="0" tIns="0" rIns="0" bIns="0" rtlCol="0" anchor="ctr"/>
+          <a:lstStyle/>
+          <a:p>
+            <a:pPr indent="0" marL="0">
+              <a:buNone/>
+            </a:pPr>
+            <a:r>
+              <a:rPr lang="en-US" sz="3400" b="1" dirty="0">
+                <a:solidFill>
+                  <a:srgbClr val="12233A"/>
+                </a:solidFill>
+                <a:latin typeface="Cambria" pitchFamily="34" charset="0"/>
+                <a:ea typeface="Cambria" pitchFamily="34" charset="-122"/>
+                <a:cs typeface="Cambria" pitchFamily="34" charset="-120"/>
+              </a:rPr>
+              <a:t>Vos questions, nos réponses</a:t>
+            </a:r>
+            <a:endParaRPr lang="en-US" sz="3400" dirty="0"/>
+          </a:p>
+        </p:txBody>
+      </p:sp>
+      <p:sp>
+        <p:nvSpPr>
+          <p:cNvPr id="3" name="Text 1"/>
+          <p:cNvSpPr/>
+          <p:nvPr/>
+        </p:nvSpPr>
+        <p:spPr>
+          <a:xfrm>
+            <a:off x="640080" y="1024128"/>
+            <a:ext cx="10881360" cy="320040"/>
+          </a:xfrm>
+          <a:prstGeom prst="rect">
+            <a:avLst/>
+          </a:prstGeom>
+          <a:noFill/>
+          <a:ln/>
+        </p:spPr>
+        <p:txBody>
+          <a:bodyPr wrap="square" lIns="0" tIns="0" rIns="0" bIns="0" rtlCol="0" anchor="ctr"/>
+          <a:lstStyle/>
+          <a:p>
+            <a:pPr indent="0" marL="0">
+              <a:buNone/>
+            </a:pPr>
+            <a:r>
+              <a:rPr lang="en-US" sz="1400" dirty="0">
+                <a:solidFill>
+                  <a:srgbClr val="6B7C8F"/>
+                </a:solidFill>
+                <a:latin typeface="Calibri" pitchFamily="34" charset="0"/>
+                <a:ea typeface="Calibri" pitchFamily="34" charset="-122"/>
+                <a:cs typeface="Calibri" pitchFamily="34" charset="-120"/>
+              </a:rPr>
+              <a:t>Ce que nous demandent le plus souvent les services juridiques</a:t>
+            </a:r>
+            <a:endParaRPr lang="en-US" sz="1400" dirty="0"/>
+          </a:p>
+        </p:txBody>
+      </p:sp>
+      <p:sp>
+        <p:nvSpPr>
+          <p:cNvPr id="4" name="Text 2"/>
+          <p:cNvSpPr/>
+          <p:nvPr/>
+        </p:nvSpPr>
+        <p:spPr>
+          <a:xfrm>
+            <a:off x="640080" y="1691640"/>
+            <a:ext cx="384048" cy="384048"/>
+          </a:xfrm>
+          <a:prstGeom prst="ellipse">
+            <a:avLst/>
+          </a:prstGeom>
+          <a:solidFill>
+            <a:srgbClr val="1F7A5C"/>
+          </a:solidFill>
+          <a:ln/>
+        </p:spPr>
+        <p:txBody>
+          <a:bodyPr wrap="square" lIns="0" tIns="0" rIns="0" bIns="0" rtlCol="0" anchor="ctr"/>
+          <a:lstStyle/>
+          <a:p>
+            <a:pPr algn="ctr" indent="0" marL="0">
+              <a:buNone/>
+            </a:pPr>
+            <a:r>
+              <a:rPr lang="en-US" sz="1400" b="1" dirty="0">
+                <a:solidFill>
+                  <a:srgbClr val="FFFFFF"/>
+                </a:solidFill>
+                <a:latin typeface="Calibri" pitchFamily="34" charset="0"/>
+                <a:ea typeface="Calibri" pitchFamily="34" charset="-122"/>
+                <a:cs typeface="Calibri" pitchFamily="34" charset="-120"/>
+              </a:rPr>
+              <a:t>?</a:t>
+            </a:r>
+            <a:endParaRPr lang="en-US" sz="1400" dirty="0"/>
+          </a:p>
+        </p:txBody>
+      </p:sp>
+      <p:sp>
+        <p:nvSpPr>
+          <p:cNvPr id="5" name="Text 3"/>
+          <p:cNvSpPr/>
+          <p:nvPr/>
+        </p:nvSpPr>
+        <p:spPr>
+          <a:xfrm>
+            <a:off x="1188720" y="1664208"/>
+            <a:ext cx="4800600" cy="457200"/>
+          </a:xfrm>
+          <a:prstGeom prst="rect">
+            <a:avLst/>
+          </a:prstGeom>
+          <a:noFill/>
+          <a:ln/>
+        </p:spPr>
+        <p:txBody>
+          <a:bodyPr wrap="square" lIns="0" tIns="0" rIns="0" bIns="0" rtlCol="0" anchor="ctr"/>
+          <a:lstStyle/>
+          <a:p>
+            <a:pPr indent="0" marL="0">
+              <a:lnSpc>
+                <a:spcPts val="1550"/>
+              </a:lnSpc>
+              <a:buNone/>
+            </a:pPr>
+            <a:r>
+              <a:rPr lang="en-US" sz="1300" b="1" dirty="0">
+                <a:solidFill>
+                  <a:srgbClr val="12233A"/>
+                </a:solidFill>
+                <a:latin typeface="Calibri" pitchFamily="34" charset="0"/>
+                <a:ea typeface="Calibri" pitchFamily="34" charset="-122"/>
+                <a:cs typeface="Calibri" pitchFamily="34" charset="-120"/>
+              </a:rPr>
+              <a:t>Nos données sortent-elles de l’Union européenne ?</a:t>
+            </a:r>
+            <a:endParaRPr lang="en-US" sz="1300" dirty="0"/>
+          </a:p>
+        </p:txBody>
+      </p:sp>
+      <p:sp>
+        <p:nvSpPr>
+          <p:cNvPr id="6" name="Text 4"/>
+          <p:cNvSpPr/>
+          <p:nvPr/>
+        </p:nvSpPr>
+        <p:spPr>
+          <a:xfrm>
+            <a:off x="1188720" y="2148840"/>
+            <a:ext cx="4800600" cy="868680"/>
+          </a:xfrm>
+          <a:prstGeom prst="rect">
+            <a:avLst/>
+          </a:prstGeom>
+          <a:noFill/>
+          <a:ln/>
+        </p:spPr>
+        <p:txBody>
+          <a:bodyPr wrap="square" lIns="0" tIns="0" rIns="0" bIns="0" rtlCol="0" anchor="ctr"/>
+          <a:lstStyle/>
+          <a:p>
+            <a:pPr indent="0" marL="0">
+              <a:lnSpc>
+                <a:spcPts val="1500"/>
+              </a:lnSpc>
+              <a:buNone/>
+            </a:pPr>
+            <a:r>
+              <a:rPr lang="en-US" sz="1150" dirty="0">
+                <a:solidFill>
+                  <a:srgbClr val="1B2A3A"/>
+                </a:solidFill>
+                <a:latin typeface="Calibri" pitchFamily="34" charset="0"/>
+                <a:ea typeface="Calibri" pitchFamily="34" charset="-122"/>
+                <a:cs typeface="Calibri" pitchFamily="34" charset="-120"/>
+              </a:rPr>
+              <a:t>La base est en Irlande. Certains prestataires sont établis aux États-Unis ; tous sont nommés dans notre politique.</a:t>
+            </a:r>
+            <a:endParaRPr lang="en-US" sz="1150" dirty="0"/>
+          </a:p>
+        </p:txBody>
+      </p:sp>
+      <p:sp>
+        <p:nvSpPr>
+          <p:cNvPr id="7" name="Text 5"/>
+          <p:cNvSpPr/>
+          <p:nvPr/>
+        </p:nvSpPr>
+        <p:spPr>
+          <a:xfrm>
+            <a:off x="6263640" y="1691640"/>
+            <a:ext cx="384048" cy="384048"/>
+          </a:xfrm>
+          <a:prstGeom prst="ellipse">
+            <a:avLst/>
+          </a:prstGeom>
+          <a:solidFill>
+            <a:srgbClr val="1F7A5C"/>
+          </a:solidFill>
+          <a:ln/>
+        </p:spPr>
+        <p:txBody>
+          <a:bodyPr wrap="square" lIns="0" tIns="0" rIns="0" bIns="0" rtlCol="0" anchor="ctr"/>
+          <a:lstStyle/>
+          <a:p>
+            <a:pPr algn="ctr" indent="0" marL="0">
+              <a:buNone/>
+            </a:pPr>
+            <a:r>
+              <a:rPr lang="en-US" sz="1400" b="1" dirty="0">
+                <a:solidFill>
+                  <a:srgbClr val="FFFFFF"/>
+                </a:solidFill>
+                <a:latin typeface="Calibri" pitchFamily="34" charset="0"/>
+                <a:ea typeface="Calibri" pitchFamily="34" charset="-122"/>
+                <a:cs typeface="Calibri" pitchFamily="34" charset="-120"/>
+              </a:rPr>
+              <a:t>?</a:t>
+            </a:r>
+            <a:endParaRPr lang="en-US" sz="1400" dirty="0"/>
+          </a:p>
+        </p:txBody>
+      </p:sp>
+      <p:sp>
+        <p:nvSpPr>
+          <p:cNvPr id="8" name="Text 6"/>
+          <p:cNvSpPr/>
+          <p:nvPr/>
+        </p:nvSpPr>
+        <p:spPr>
+          <a:xfrm>
+            <a:off x="6812280" y="1664208"/>
+            <a:ext cx="4800600" cy="457200"/>
+          </a:xfrm>
+          <a:prstGeom prst="rect">
+            <a:avLst/>
+          </a:prstGeom>
+          <a:noFill/>
+          <a:ln/>
+        </p:spPr>
+        <p:txBody>
+          <a:bodyPr wrap="square" lIns="0" tIns="0" rIns="0" bIns="0" rtlCol="0" anchor="ctr"/>
+          <a:lstStyle/>
+          <a:p>
+            <a:pPr indent="0" marL="0">
+              <a:lnSpc>
+                <a:spcPts val="1550"/>
+              </a:lnSpc>
+              <a:buNone/>
+            </a:pPr>
+            <a:r>
+              <a:rPr lang="en-US" sz="1300" b="1" dirty="0">
+                <a:solidFill>
+                  <a:srgbClr val="12233A"/>
+                </a:solidFill>
+                <a:latin typeface="Calibri" pitchFamily="34" charset="0"/>
+                <a:ea typeface="Calibri" pitchFamily="34" charset="-122"/>
+                <a:cs typeface="Calibri" pitchFamily="34" charset="-120"/>
+              </a:rPr>
+              <a:t>Un magasin peut-il voir les inventaires d’un autre ?</a:t>
+            </a:r>
+            <a:endParaRPr lang="en-US" sz="1300" dirty="0"/>
+          </a:p>
+        </p:txBody>
+      </p:sp>
+      <p:sp>
+        <p:nvSpPr>
+          <p:cNvPr id="9" name="Text 7"/>
+          <p:cNvSpPr/>
+          <p:nvPr/>
+        </p:nvSpPr>
+        <p:spPr>
+          <a:xfrm>
+            <a:off x="6812280" y="2148840"/>
+            <a:ext cx="4800600" cy="868680"/>
+          </a:xfrm>
+          <a:prstGeom prst="rect">
+            <a:avLst/>
+          </a:prstGeom>
+          <a:noFill/>
+          <a:ln/>
+        </p:spPr>
+        <p:txBody>
+          <a:bodyPr wrap="square" lIns="0" tIns="0" rIns="0" bIns="0" rtlCol="0" anchor="ctr"/>
+          <a:lstStyle/>
+          <a:p>
+            <a:pPr indent="0" marL="0">
+              <a:lnSpc>
+                <a:spcPts val="1500"/>
+              </a:lnSpc>
+              <a:buNone/>
+            </a:pPr>
+            <a:r>
+              <a:rPr lang="en-US" sz="1150" dirty="0">
+                <a:solidFill>
+                  <a:srgbClr val="1B2A3A"/>
+                </a:solidFill>
+                <a:latin typeface="Calibri" pitchFamily="34" charset="0"/>
+                <a:ea typeface="Calibri" pitchFamily="34" charset="-122"/>
+                <a:cs typeface="Calibri" pitchFamily="34" charset="-120"/>
+              </a:rPr>
+              <a:t>Non. Le cloisonnement est appliqué par la base de données ligne par ligne, indépendamment de l’application.</a:t>
+            </a:r>
+            <a:endParaRPr lang="en-US" sz="1150" dirty="0"/>
+          </a:p>
+        </p:txBody>
+      </p:sp>
+      <p:sp>
+        <p:nvSpPr>
+          <p:cNvPr id="10" name="Text 8"/>
+          <p:cNvSpPr/>
+          <p:nvPr/>
+        </p:nvSpPr>
+        <p:spPr>
+          <a:xfrm>
+            <a:off x="640080" y="3154680"/>
+            <a:ext cx="384048" cy="384048"/>
+          </a:xfrm>
+          <a:prstGeom prst="ellipse">
+            <a:avLst/>
+          </a:prstGeom>
+          <a:solidFill>
+            <a:srgbClr val="1F7A5C"/>
+          </a:solidFill>
+          <a:ln/>
+        </p:spPr>
+        <p:txBody>
+          <a:bodyPr wrap="square" lIns="0" tIns="0" rIns="0" bIns="0" rtlCol="0" anchor="ctr"/>
+          <a:lstStyle/>
+          <a:p>
+            <a:pPr algn="ctr" indent="0" marL="0">
+              <a:buNone/>
+            </a:pPr>
+            <a:r>
+              <a:rPr lang="en-US" sz="1400" b="1" dirty="0">
+                <a:solidFill>
+                  <a:srgbClr val="FFFFFF"/>
+                </a:solidFill>
+                <a:latin typeface="Calibri" pitchFamily="34" charset="0"/>
+                <a:ea typeface="Calibri" pitchFamily="34" charset="-122"/>
+                <a:cs typeface="Calibri" pitchFamily="34" charset="-120"/>
+              </a:rPr>
+              <a:t>?</a:t>
+            </a:r>
+            <a:endParaRPr lang="en-US" sz="1400" dirty="0"/>
+          </a:p>
+        </p:txBody>
+      </p:sp>
+      <p:sp>
+        <p:nvSpPr>
+          <p:cNvPr id="11" name="Text 9"/>
+          <p:cNvSpPr/>
+          <p:nvPr/>
+        </p:nvSpPr>
+        <p:spPr>
+          <a:xfrm>
+            <a:off x="1188720" y="3127248"/>
+            <a:ext cx="4800600" cy="457200"/>
+          </a:xfrm>
+          <a:prstGeom prst="rect">
+            <a:avLst/>
+          </a:prstGeom>
+          <a:noFill/>
+          <a:ln/>
+        </p:spPr>
+        <p:txBody>
+          <a:bodyPr wrap="square" lIns="0" tIns="0" rIns="0" bIns="0" rtlCol="0" anchor="ctr"/>
+          <a:lstStyle/>
+          <a:p>
+            <a:pPr indent="0" marL="0">
+              <a:lnSpc>
+                <a:spcPts val="1550"/>
+              </a:lnSpc>
+              <a:buNone/>
+            </a:pPr>
+            <a:r>
+              <a:rPr lang="en-US" sz="1300" b="1" dirty="0">
+                <a:solidFill>
+                  <a:srgbClr val="12233A"/>
+                </a:solidFill>
+                <a:latin typeface="Calibri" pitchFamily="34" charset="0"/>
+                <a:ea typeface="Calibri" pitchFamily="34" charset="-122"/>
+                <a:cs typeface="Calibri" pitchFamily="34" charset="-120"/>
+              </a:rPr>
+              <a:t>Utilisez-vous des cookies ou du traçage ?</a:t>
+            </a:r>
+            <a:endParaRPr lang="en-US" sz="1300" dirty="0"/>
+          </a:p>
+        </p:txBody>
+      </p:sp>
+      <p:sp>
+        <p:nvSpPr>
+          <p:cNvPr id="12" name="Text 10"/>
+          <p:cNvSpPr/>
+          <p:nvPr/>
+        </p:nvSpPr>
+        <p:spPr>
+          <a:xfrm>
+            <a:off x="1188720" y="3611880"/>
+            <a:ext cx="4800600" cy="868680"/>
+          </a:xfrm>
+          <a:prstGeom prst="rect">
+            <a:avLst/>
+          </a:prstGeom>
+          <a:noFill/>
+          <a:ln/>
+        </p:spPr>
+        <p:txBody>
+          <a:bodyPr wrap="square" lIns="0" tIns="0" rIns="0" bIns="0" rtlCol="0" anchor="ctr"/>
+          <a:lstStyle/>
+          <a:p>
+            <a:pPr indent="0" marL="0">
+              <a:lnSpc>
+                <a:spcPts val="1500"/>
+              </a:lnSpc>
+              <a:buNone/>
+            </a:pPr>
+            <a:r>
+              <a:rPr lang="en-US" sz="1150" dirty="0">
+                <a:solidFill>
+                  <a:srgbClr val="1B2A3A"/>
+                </a:solidFill>
+                <a:latin typeface="Calibri" pitchFamily="34" charset="0"/>
+                <a:ea typeface="Calibri" pitchFamily="34" charset="-122"/>
+                <a:cs typeface="Calibri" pitchFamily="34" charset="-120"/>
+              </a:rPr>
+              <a:t>Aucun. Ni mesure d’audience, ni publicité, ni bandeau de consentement.</a:t>
+            </a:r>
+            <a:endParaRPr lang="en-US" sz="1150" dirty="0"/>
+          </a:p>
+        </p:txBody>
+      </p:sp>
+      <p:sp>
+        <p:nvSpPr>
+          <p:cNvPr id="13" name="Text 11"/>
+          <p:cNvSpPr/>
+          <p:nvPr/>
+        </p:nvSpPr>
+        <p:spPr>
+          <a:xfrm>
+            <a:off x="6263640" y="3154680"/>
+            <a:ext cx="384048" cy="384048"/>
+          </a:xfrm>
+          <a:prstGeom prst="ellipse">
+            <a:avLst/>
+          </a:prstGeom>
+          <a:solidFill>
+            <a:srgbClr val="1F7A5C"/>
+          </a:solidFill>
+          <a:ln/>
+        </p:spPr>
+        <p:txBody>
+          <a:bodyPr wrap="square" lIns="0" tIns="0" rIns="0" bIns="0" rtlCol="0" anchor="ctr"/>
+          <a:lstStyle/>
+          <a:p>
+            <a:pPr algn="ctr" indent="0" marL="0">
+              <a:buNone/>
+            </a:pPr>
+            <a:r>
+              <a:rPr lang="en-US" sz="1400" b="1" dirty="0">
+                <a:solidFill>
+                  <a:srgbClr val="FFFFFF"/>
+                </a:solidFill>
+                <a:latin typeface="Calibri" pitchFamily="34" charset="0"/>
+                <a:ea typeface="Calibri" pitchFamily="34" charset="-122"/>
+                <a:cs typeface="Calibri" pitchFamily="34" charset="-120"/>
+              </a:rPr>
+              <a:t>?</a:t>
+            </a:r>
+            <a:endParaRPr lang="en-US" sz="1400" dirty="0"/>
+          </a:p>
+        </p:txBody>
+      </p:sp>
+      <p:sp>
+        <p:nvSpPr>
+          <p:cNvPr id="14" name="Text 12"/>
+          <p:cNvSpPr/>
+          <p:nvPr/>
+        </p:nvSpPr>
+        <p:spPr>
+          <a:xfrm>
+            <a:off x="6812280" y="3127248"/>
+            <a:ext cx="4800600" cy="457200"/>
+          </a:xfrm>
+          <a:prstGeom prst="rect">
+            <a:avLst/>
+          </a:prstGeom>
+          <a:noFill/>
+          <a:ln/>
+        </p:spPr>
+        <p:txBody>
+          <a:bodyPr wrap="square" lIns="0" tIns="0" rIns="0" bIns="0" rtlCol="0" anchor="ctr"/>
+          <a:lstStyle/>
+          <a:p>
+            <a:pPr indent="0" marL="0">
+              <a:lnSpc>
+                <a:spcPts val="1550"/>
+              </a:lnSpc>
+              <a:buNone/>
+            </a:pPr>
+            <a:r>
+              <a:rPr lang="en-US" sz="1300" b="1" dirty="0">
+                <a:solidFill>
+                  <a:srgbClr val="12233A"/>
+                </a:solidFill>
+                <a:latin typeface="Calibri" pitchFamily="34" charset="0"/>
+                <a:ea typeface="Calibri" pitchFamily="34" charset="-122"/>
+                <a:cs typeface="Calibri" pitchFamily="34" charset="-120"/>
+              </a:rPr>
+              <a:t>Que se passe-t-il en cas de violation de données ?</a:t>
+            </a:r>
+            <a:endParaRPr lang="en-US" sz="1300" dirty="0"/>
+          </a:p>
+        </p:txBody>
+      </p:sp>
+      <p:sp>
+        <p:nvSpPr>
+          <p:cNvPr id="15" name="Text 13"/>
+          <p:cNvSpPr/>
+          <p:nvPr/>
+        </p:nvSpPr>
+        <p:spPr>
+          <a:xfrm>
+            <a:off x="6812280" y="3611880"/>
+            <a:ext cx="4800600" cy="868680"/>
+          </a:xfrm>
+          <a:prstGeom prst="rect">
+            <a:avLst/>
+          </a:prstGeom>
+          <a:noFill/>
+          <a:ln/>
+        </p:spPr>
+        <p:txBody>
+          <a:bodyPr wrap="square" lIns="0" tIns="0" rIns="0" bIns="0" rtlCol="0" anchor="ctr"/>
+          <a:lstStyle/>
+          <a:p>
+            <a:pPr indent="0" marL="0">
+              <a:lnSpc>
+                <a:spcPts val="1500"/>
+              </a:lnSpc>
+              <a:buNone/>
+            </a:pPr>
+            <a:r>
+              <a:rPr lang="en-US" sz="1150" dirty="0">
+                <a:solidFill>
+                  <a:srgbClr val="1B2A3A"/>
+                </a:solidFill>
+                <a:latin typeface="Calibri" pitchFamily="34" charset="0"/>
+                <a:ea typeface="Calibri" pitchFamily="34" charset="-122"/>
+                <a:cs typeface="Calibri" pitchFamily="34" charset="-120"/>
+              </a:rPr>
+              <a:t>Procédure écrite. Nous vous alertons sans délai ; sur vos données, c’est vous qui notifiez la CNIL sous 72 heures.</a:t>
+            </a:r>
+            <a:endParaRPr lang="en-US" sz="1150" dirty="0"/>
+          </a:p>
+        </p:txBody>
+      </p:sp>
+      <p:sp>
+        <p:nvSpPr>
+          <p:cNvPr id="16" name="Text 14"/>
+          <p:cNvSpPr/>
+          <p:nvPr/>
+        </p:nvSpPr>
+        <p:spPr>
+          <a:xfrm>
+            <a:off x="640080" y="4617720"/>
+            <a:ext cx="384048" cy="384048"/>
+          </a:xfrm>
+          <a:prstGeom prst="ellipse">
+            <a:avLst/>
+          </a:prstGeom>
+          <a:solidFill>
+            <a:srgbClr val="1F7A5C"/>
+          </a:solidFill>
+          <a:ln/>
+        </p:spPr>
+        <p:txBody>
+          <a:bodyPr wrap="square" lIns="0" tIns="0" rIns="0" bIns="0" rtlCol="0" anchor="ctr"/>
+          <a:lstStyle/>
+          <a:p>
+            <a:pPr algn="ctr" indent="0" marL="0">
+              <a:buNone/>
+            </a:pPr>
+            <a:r>
+              <a:rPr lang="en-US" sz="1400" b="1" dirty="0">
+                <a:solidFill>
+                  <a:srgbClr val="FFFFFF"/>
+                </a:solidFill>
+                <a:latin typeface="Calibri" pitchFamily="34" charset="0"/>
+                <a:ea typeface="Calibri" pitchFamily="34" charset="-122"/>
+                <a:cs typeface="Calibri" pitchFamily="34" charset="-120"/>
+              </a:rPr>
+              <a:t>?</a:t>
+            </a:r>
+            <a:endParaRPr lang="en-US" sz="1400" dirty="0"/>
+          </a:p>
+        </p:txBody>
+      </p:sp>
+      <p:sp>
+        <p:nvSpPr>
+          <p:cNvPr id="17" name="Text 15"/>
+          <p:cNvSpPr/>
+          <p:nvPr/>
+        </p:nvSpPr>
+        <p:spPr>
+          <a:xfrm>
+            <a:off x="1188720" y="4590288"/>
+            <a:ext cx="4800600" cy="457200"/>
+          </a:xfrm>
+          <a:prstGeom prst="rect">
+            <a:avLst/>
+          </a:prstGeom>
+          <a:noFill/>
+          <a:ln/>
+        </p:spPr>
+        <p:txBody>
+          <a:bodyPr wrap="square" lIns="0" tIns="0" rIns="0" bIns="0" rtlCol="0" anchor="ctr"/>
+          <a:lstStyle/>
+          <a:p>
+            <a:pPr indent="0" marL="0">
+              <a:lnSpc>
+                <a:spcPts val="1550"/>
+              </a:lnSpc>
+              <a:buNone/>
+            </a:pPr>
+            <a:r>
+              <a:rPr lang="en-US" sz="1300" b="1" dirty="0">
+                <a:solidFill>
+                  <a:srgbClr val="12233A"/>
+                </a:solidFill>
+                <a:latin typeface="Calibri" pitchFamily="34" charset="0"/>
+                <a:ea typeface="Calibri" pitchFamily="34" charset="-122"/>
+                <a:cs typeface="Calibri" pitchFamily="34" charset="-120"/>
+              </a:rPr>
+              <a:t>Nos salariés sont-ils surveillés pendant un inventaire ?</a:t>
+            </a:r>
+            <a:endParaRPr lang="en-US" sz="1300" dirty="0"/>
+          </a:p>
+        </p:txBody>
+      </p:sp>
+      <p:sp>
+        <p:nvSpPr>
+          <p:cNvPr id="18" name="Text 16"/>
+          <p:cNvSpPr/>
+          <p:nvPr/>
+        </p:nvSpPr>
+        <p:spPr>
+          <a:xfrm>
+            <a:off x="1188720" y="5074920"/>
+            <a:ext cx="4800600" cy="868680"/>
+          </a:xfrm>
+          <a:prstGeom prst="rect">
+            <a:avLst/>
+          </a:prstGeom>
+          <a:noFill/>
+          <a:ln/>
+        </p:spPr>
+        <p:txBody>
+          <a:bodyPr wrap="square" lIns="0" tIns="0" rIns="0" bIns="0" rtlCol="0" anchor="ctr"/>
+          <a:lstStyle/>
+          <a:p>
+            <a:pPr indent="0" marL="0">
+              <a:lnSpc>
+                <a:spcPts val="1500"/>
+              </a:lnSpc>
+              <a:buNone/>
+            </a:pPr>
+            <a:r>
+              <a:rPr lang="en-US" sz="1150" dirty="0">
+                <a:solidFill>
+                  <a:srgbClr val="1B2A3A"/>
+                </a:solidFill>
+                <a:latin typeface="Calibri" pitchFamily="34" charset="0"/>
+                <a:ea typeface="Calibri" pitchFamily="34" charset="-122"/>
+                <a:cs typeface="Calibri" pitchFamily="34" charset="-120"/>
+              </a:rPr>
+              <a:t>Non. Le superviseur voit des compteurs agrégés, jamais qui fait quoi en direct. L’auteur d’un comptage n’apparaît que dans le rapport, après coup.</a:t>
+            </a:r>
+            <a:endParaRPr lang="en-US" sz="1150" dirty="0"/>
+          </a:p>
+        </p:txBody>
+      </p:sp>
+      <p:sp>
+        <p:nvSpPr>
+          <p:cNvPr id="19" name="Text 17"/>
+          <p:cNvSpPr/>
+          <p:nvPr/>
+        </p:nvSpPr>
+        <p:spPr>
+          <a:xfrm>
+            <a:off x="6263640" y="4617720"/>
+            <a:ext cx="384048" cy="384048"/>
+          </a:xfrm>
+          <a:prstGeom prst="ellipse">
+            <a:avLst/>
+          </a:prstGeom>
+          <a:solidFill>
+            <a:srgbClr val="1F7A5C"/>
+          </a:solidFill>
+          <a:ln/>
+        </p:spPr>
+        <p:txBody>
+          <a:bodyPr wrap="square" lIns="0" tIns="0" rIns="0" bIns="0" rtlCol="0" anchor="ctr"/>
+          <a:lstStyle/>
+          <a:p>
+            <a:pPr algn="ctr" indent="0" marL="0">
+              <a:buNone/>
+            </a:pPr>
+            <a:r>
+              <a:rPr lang="en-US" sz="1400" b="1" dirty="0">
+                <a:solidFill>
+                  <a:srgbClr val="FFFFFF"/>
+                </a:solidFill>
+                <a:latin typeface="Calibri" pitchFamily="34" charset="0"/>
+                <a:ea typeface="Calibri" pitchFamily="34" charset="-122"/>
+                <a:cs typeface="Calibri" pitchFamily="34" charset="-120"/>
+              </a:rPr>
+              <a:t>?</a:t>
+            </a:r>
+            <a:endParaRPr lang="en-US" sz="1400" dirty="0"/>
+          </a:p>
+        </p:txBody>
+      </p:sp>
+      <p:sp>
+        <p:nvSpPr>
+          <p:cNvPr id="20" name="Text 18"/>
+          <p:cNvSpPr/>
+          <p:nvPr/>
+        </p:nvSpPr>
+        <p:spPr>
+          <a:xfrm>
+            <a:off x="6812280" y="4590288"/>
+            <a:ext cx="4800600" cy="457200"/>
+          </a:xfrm>
+          <a:prstGeom prst="rect">
+            <a:avLst/>
+          </a:prstGeom>
+          <a:noFill/>
+          <a:ln/>
+        </p:spPr>
+        <p:txBody>
+          <a:bodyPr wrap="square" lIns="0" tIns="0" rIns="0" bIns="0" rtlCol="0" anchor="ctr"/>
+          <a:lstStyle/>
+          <a:p>
+            <a:pPr indent="0" marL="0">
+              <a:lnSpc>
+                <a:spcPts val="1550"/>
+              </a:lnSpc>
+              <a:buNone/>
+            </a:pPr>
+            <a:r>
+              <a:rPr lang="en-US" sz="1300" b="1" dirty="0">
+                <a:solidFill>
+                  <a:srgbClr val="12233A"/>
+                </a:solidFill>
+                <a:latin typeface="Calibri" pitchFamily="34" charset="0"/>
+                <a:ea typeface="Calibri" pitchFamily="34" charset="-122"/>
+                <a:cs typeface="Calibri" pitchFamily="34" charset="-120"/>
+              </a:rPr>
+              <a:t>Un salarié peut-il récupérer ou effacer ses données ?</a:t>
+            </a:r>
+            <a:endParaRPr lang="en-US" sz="1300" dirty="0"/>
+          </a:p>
+        </p:txBody>
+      </p:sp>
+      <p:sp>
+        <p:nvSpPr>
+          <p:cNvPr id="21" name="Text 19"/>
+          <p:cNvSpPr/>
+          <p:nvPr/>
+        </p:nvSpPr>
+        <p:spPr>
+          <a:xfrm>
+            <a:off x="6812280" y="5074920"/>
+            <a:ext cx="4800600" cy="868680"/>
+          </a:xfrm>
+          <a:prstGeom prst="rect">
+            <a:avLst/>
+          </a:prstGeom>
+          <a:noFill/>
+          <a:ln/>
+        </p:spPr>
+        <p:txBody>
+          <a:bodyPr wrap="square" lIns="0" tIns="0" rIns="0" bIns="0" rtlCol="0" anchor="ctr"/>
+          <a:lstStyle/>
+          <a:p>
+            <a:pPr indent="0" marL="0">
+              <a:lnSpc>
+                <a:spcPts val="1500"/>
+              </a:lnSpc>
+              <a:buNone/>
+            </a:pPr>
+            <a:r>
+              <a:rPr lang="en-US" sz="1150" dirty="0">
+                <a:solidFill>
+                  <a:srgbClr val="1B2A3A"/>
+                </a:solidFill>
+                <a:latin typeface="Calibri" pitchFamily="34" charset="0"/>
+                <a:ea typeface="Calibri" pitchFamily="34" charset="-122"/>
+                <a:cs typeface="Calibri" pitchFamily="34" charset="-120"/>
+              </a:rPr>
+              <a:t>Oui : export en un clic depuis son compte, et suppression sur demande — les comptages sont alors anonymisés, pas détruits.</a:t>
+            </a:r>
+            <a:endParaRPr lang="en-US" sz="1150" dirty="0"/>
+          </a:p>
+        </p:txBody>
+      </p:sp>
+    </p:spTree>
+  </p:cSld>
+  <p:clrMapOvr>
+    <a:masterClrMapping/>
+  </p:clrMapOvr>
+</p:sld>
+</file>
+
+<file path=ppt/slides/slide14.xml><?xml version="1.0" encoding="utf-8"?>
+<p:sld xmlns:a="http://schemas.openxmlformats.org/drawingml/2006/main" xmlns:r="http://schemas.openxmlformats.org/officeDocument/2006/relationships" xmlns:p="http://schemas.openxmlformats.org/presentationml/2006/main">
+  <p:cSld name="Slide 14">
     <p:bg>
       <p:bgPr>
         <a:solidFill>
@@ -6187,7 +6897,7 @@
                 <a:ea typeface="Calibri" pitchFamily="34" charset="-122"/>
                 <a:cs typeface="Calibri" pitchFamily="34" charset="-120"/>
               </a:rPr>
-              <a:t>Suivi d’activité des équipes et documentation juridique — détail en fin de document.</a:t>
+              <a:t>La documentation juridique, rédigée, attend sa relecture par un conseil.</a:t>
             </a:r>
             <a:endParaRPr lang="en-US" sz="1150" dirty="0"/>
           </a:p>
@@ -7419,7 +8129,7 @@
                 <a:ea typeface="Calibri" pitchFamily="34" charset="-122"/>
                 <a:cs typeface="Calibri" pitchFamily="34" charset="-120"/>
               </a:rPr>
-              <a:t>7 constats — 5 clos, 1 au socle en place, 1 en cours</a:t>
+              <a:t>7 constats — 6 clos, 1 au socle en place</a:t>
             </a:r>
             <a:endParaRPr lang="en-US" sz="1400" dirty="0"/>
           </a:p>
@@ -7756,7 +8466,7 @@
             <a:avLst/>
           </a:prstGeom>
           <a:solidFill>
-            <a:srgbClr val="9B2C2C"/>
+            <a:srgbClr val="1F7A5C"/>
           </a:solidFill>
           <a:ln/>
         </p:spPr>
@@ -7854,7 +8564,7 @@
                 <a:ea typeface="Calibri" pitchFamily="34" charset="-122"/>
                 <a:cs typeface="Calibri" pitchFamily="34" charset="-120"/>
               </a:rPr>
-              <a:t>Suivi nominatif ni documenté ni annoncé.</a:t>
+              <a:t>Suivi nominatif du travail de chacun, en direct.</a:t>
             </a:r>
             <a:endParaRPr lang="en-US" sz="1200" dirty="0"/>
           </a:p>
@@ -7887,13 +8597,13 @@
             <a:r>
               <a:rPr lang="en-US" sz="1150" b="1" dirty="0">
                 <a:solidFill>
-                  <a:srgbClr val="9B2C2C"/>
-                </a:solidFill>
-                <a:latin typeface="Calibri" pitchFamily="34" charset="0"/>
-                <a:ea typeface="Calibri" pitchFamily="34" charset="-122"/>
-                <a:cs typeface="Calibri" pitchFamily="34" charset="-120"/>
-              </a:rPr>
-              <a:t>En cours</a:t>
+                  <a:srgbClr val="1F7A5C"/>
+                </a:solidFill>
+                <a:latin typeface="Calibri" pitchFamily="34" charset="0"/>
+                <a:ea typeface="Calibri" pitchFamily="34" charset="-122"/>
+                <a:cs typeface="Calibri" pitchFamily="34" charset="-120"/>
+              </a:rPr>
+              <a:t>Clos</a:t>
             </a:r>
             <a:endParaRPr lang="en-US" sz="1150" dirty="0"/>
           </a:p>
@@ -8670,7 +9380,7 @@
                 <a:ea typeface="Calibri" pitchFamily="34" charset="-122"/>
                 <a:cs typeface="Calibri" pitchFamily="34" charset="-120"/>
               </a:rPr>
-              <a:t>6 constats — 5 clos, 1 en cours</a:t>
+              <a:t>6 constats — 5 clos, 1 en relecture</a:t>
             </a:r>
             <a:endParaRPr lang="en-US" sz="1400" dirty="0"/>
           </a:p>
